--- a/LabBook_020.pptx
+++ b/LabBook_020.pptx
@@ -5,17 +5,18 @@
     <p:sldMasterId id="2147483648" r:id="rId1"/>
   </p:sldMasterIdLst>
   <p:notesMasterIdLst>
-    <p:notesMasterId r:id="rId7"/>
+    <p:notesMasterId r:id="rId8"/>
   </p:notesMasterIdLst>
   <p:handoutMasterIdLst>
-    <p:handoutMasterId r:id="rId8"/>
+    <p:handoutMasterId r:id="rId9"/>
   </p:handoutMasterIdLst>
   <p:sldIdLst>
     <p:sldId id="256" r:id="rId2"/>
     <p:sldId id="289" r:id="rId3"/>
     <p:sldId id="290" r:id="rId4"/>
     <p:sldId id="293" r:id="rId5"/>
-    <p:sldId id="288" r:id="rId6"/>
+    <p:sldId id="294" r:id="rId6"/>
+    <p:sldId id="288" r:id="rId7"/>
   </p:sldIdLst>
   <p:sldSz cx="12192000" cy="6858000"/>
   <p:notesSz cx="12192000" cy="6858000"/>
@@ -297,7 +298,7 @@
           <a:p>
             <a:fld id="{8438F8DC-35B0-48E6-A86E-42F1F08DD00F}" type="datetimeFigureOut">
               <a:rPr lang="es-ES" smtClean="0"/>
-              <a:t>03/02/2026</a:t>
+              <a:t>16/02/2026</a:t>
             </a:fld>
             <a:endParaRPr lang="es-ES"/>
           </a:p>
@@ -375,7 +376,7 @@
           <a:p>
             <a:fld id="{4116A549-763A-4A89-A454-A94BAF51395E}" type="slidenum">
               <a:rPr lang="es-ES" smtClean="0"/>
-              <a:t>‹Nº›</a:t>
+              <a:t>‹#›</a:t>
             </a:fld>
             <a:endParaRPr lang="es-ES"/>
           </a:p>
@@ -474,7 +475,7 @@
           <a:p>
             <a:fld id="{FACBDC12-F39B-4B97-8F4D-6734F9D366FF}" type="datetimeFigureOut">
               <a:rPr lang="es-ES" smtClean="0"/>
-              <a:t>03/02/2026</a:t>
+              <a:t>16/02/2026</a:t>
             </a:fld>
             <a:endParaRPr lang="es-ES"/>
           </a:p>
@@ -632,7 +633,7 @@
           <a:p>
             <a:fld id="{676223B9-C868-4436-87D9-1A3152E1157A}" type="slidenum">
               <a:rPr lang="es-ES" smtClean="0"/>
-              <a:t>‹Nº›</a:t>
+              <a:t>‹#›</a:t>
             </a:fld>
             <a:endParaRPr lang="es-ES"/>
           </a:p>
@@ -933,6 +934,125 @@
 </p:notes>
 </file>
 
+<file path=ppt/notesSlides/notesSlide3.xml><?xml version="1.0" encoding="utf-8"?>
+<p:notes xmlns:a="http://schemas.openxmlformats.org/drawingml/2006/main" xmlns:r="http://schemas.openxmlformats.org/officeDocument/2006/relationships" xmlns:p="http://schemas.openxmlformats.org/presentationml/2006/main">
+  <p:cSld>
+    <p:spTree>
+      <p:nvGrpSpPr>
+        <p:cNvPr id="1" name="">
+          <a:extLst>
+            <a:ext uri="{FF2B5EF4-FFF2-40B4-BE49-F238E27FC236}">
+              <a16:creationId xmlns:a16="http://schemas.microsoft.com/office/drawing/2014/main" id="{090D91D2-5C68-7463-BB22-512D033A498E}"/>
+            </a:ext>
+          </a:extLst>
+        </p:cNvPr>
+        <p:cNvGrpSpPr/>
+        <p:nvPr/>
+      </p:nvGrpSpPr>
+      <p:grpSpPr>
+        <a:xfrm>
+          <a:off x="0" y="0"/>
+          <a:ext cx="0" cy="0"/>
+          <a:chOff x="0" y="0"/>
+          <a:chExt cx="0" cy="0"/>
+        </a:xfrm>
+      </p:grpSpPr>
+      <p:sp>
+        <p:nvSpPr>
+          <p:cNvPr id="2" name="Marcador de imagen de diapositiva 1">
+            <a:extLst>
+              <a:ext uri="{FF2B5EF4-FFF2-40B4-BE49-F238E27FC236}">
+                <a16:creationId xmlns:a16="http://schemas.microsoft.com/office/drawing/2014/main" id="{9DC91D77-F470-DC6E-ABBE-D88D38EC6293}"/>
+              </a:ext>
+            </a:extLst>
+          </p:cNvPr>
+          <p:cNvSpPr>
+            <a:spLocks noGrp="1" noRot="1" noChangeAspect="1"/>
+          </p:cNvSpPr>
+          <p:nvPr>
+            <p:ph type="sldImg"/>
+          </p:nvPr>
+        </p:nvSpPr>
+        <p:spPr/>
+      </p:sp>
+      <p:sp>
+        <p:nvSpPr>
+          <p:cNvPr id="3" name="Marcador de notas 2">
+            <a:extLst>
+              <a:ext uri="{FF2B5EF4-FFF2-40B4-BE49-F238E27FC236}">
+                <a16:creationId xmlns:a16="http://schemas.microsoft.com/office/drawing/2014/main" id="{8B3C1124-A0EE-7324-4A71-2D62A5344F93}"/>
+              </a:ext>
+            </a:extLst>
+          </p:cNvPr>
+          <p:cNvSpPr>
+            <a:spLocks noGrp="1"/>
+          </p:cNvSpPr>
+          <p:nvPr>
+            <p:ph type="body" idx="1"/>
+          </p:nvPr>
+        </p:nvSpPr>
+        <p:spPr/>
+        <p:txBody>
+          <a:bodyPr/>
+          <a:lstStyle/>
+          <a:p>
+            <a:r>
+              <a:rPr lang="es-ES" dirty="0"/>
+              <a:t>Mencionar que a medida que incrementa el ancho de la guía se incrementa el numero de modos que se propaga a través de la misma, una forma practica de conocer el numero de modos es llevar a cabo las simulaciones de su índice efectivo y verificar el punto en los que estos comienzan a acercarse al índice efectivo del </a:t>
+            </a:r>
+            <a:r>
+              <a:rPr lang="es-ES" dirty="0" err="1"/>
+              <a:t>cladding</a:t>
+            </a:r>
+            <a:r>
+              <a:rPr lang="es-ES" dirty="0"/>
+              <a:t>, podríamos afirmar que a partir del modo 23 comienza a acercarse al índice de refracción del silicio de 1,45 </a:t>
+            </a:r>
+          </a:p>
+        </p:txBody>
+      </p:sp>
+      <p:sp>
+        <p:nvSpPr>
+          <p:cNvPr id="4" name="Marcador de número de diapositiva 3">
+            <a:extLst>
+              <a:ext uri="{FF2B5EF4-FFF2-40B4-BE49-F238E27FC236}">
+                <a16:creationId xmlns:a16="http://schemas.microsoft.com/office/drawing/2014/main" id="{A64A9024-0BF4-5A2E-B819-2FF537F04280}"/>
+              </a:ext>
+            </a:extLst>
+          </p:cNvPr>
+          <p:cNvSpPr>
+            <a:spLocks noGrp="1"/>
+          </p:cNvSpPr>
+          <p:nvPr>
+            <p:ph type="sldNum" sz="quarter" idx="5"/>
+          </p:nvPr>
+        </p:nvSpPr>
+        <p:spPr/>
+        <p:txBody>
+          <a:bodyPr/>
+          <a:lstStyle/>
+          <a:p>
+            <a:fld id="{676223B9-C868-4436-87D9-1A3152E1157A}" type="slidenum">
+              <a:rPr lang="es-ES" smtClean="0"/>
+              <a:t>5</a:t>
+            </a:fld>
+            <a:endParaRPr lang="es-ES"/>
+          </a:p>
+        </p:txBody>
+      </p:sp>
+    </p:spTree>
+    <p:extLst>
+      <p:ext uri="{BB962C8B-B14F-4D97-AF65-F5344CB8AC3E}">
+        <p14:creationId xmlns:p14="http://schemas.microsoft.com/office/powerpoint/2010/main" val="3632389326"/>
+      </p:ext>
+    </p:extLst>
+  </p:cSld>
+  <p:clrMapOvr>
+    <a:masterClrMapping/>
+  </p:clrMapOvr>
+</p:notes>
+</file>
+
 <file path=ppt/slideLayouts/slideLayout1.xml><?xml version="1.0" encoding="utf-8"?>
 <p:sldLayout xmlns:a="http://schemas.openxmlformats.org/drawingml/2006/main" xmlns:r="http://schemas.openxmlformats.org/officeDocument/2006/relationships" xmlns:p="http://schemas.openxmlformats.org/presentationml/2006/main" type="obj" preserve="1">
   <p:cSld name="Title Slide">
@@ -1112,7 +1232,7 @@
           </a:lstStyle>
           <a:p>
             <a:fld id="{B6F15528-21DE-4FAA-801E-634DDDAF4B2B}" type="slidenum">
-              <a:t>‹Nº›</a:t>
+              <a:t>‹#›</a:t>
             </a:fld>
             <a:endParaRPr/>
           </a:p>
@@ -1279,7 +1399,7 @@
           </a:lstStyle>
           <a:p>
             <a:fld id="{B6F15528-21DE-4FAA-801E-634DDDAF4B2B}" type="slidenum">
-              <a:t>‹Nº›</a:t>
+              <a:t>‹#›</a:t>
             </a:fld>
             <a:endParaRPr/>
           </a:p>
@@ -1501,7 +1621,7 @@
           </a:lstStyle>
           <a:p>
             <a:fld id="{B6F15528-21DE-4FAA-801E-634DDDAF4B2B}" type="slidenum">
-              <a:t>‹Nº›</a:t>
+              <a:t>‹#›</a:t>
             </a:fld>
             <a:endParaRPr/>
           </a:p>
@@ -1708,7 +1828,7 @@
           </a:lstStyle>
           <a:p>
             <a:fld id="{B6F15528-21DE-4FAA-801E-634DDDAF4B2B}" type="slidenum">
-              <a:t>‹Nº›</a:t>
+              <a:t>‹#›</a:t>
             </a:fld>
             <a:endParaRPr/>
           </a:p>
@@ -1872,7 +1992,7 @@
           </a:lstStyle>
           <a:p>
             <a:fld id="{B6F15528-21DE-4FAA-801E-634DDDAF4B2B}" type="slidenum">
-              <a:t>‹Nº›</a:t>
+              <a:t>‹#›</a:t>
             </a:fld>
             <a:endParaRPr/>
           </a:p>
@@ -2174,7 +2294,7 @@
           </a:lstStyle>
           <a:p>
             <a:fld id="{B6F15528-21DE-4FAA-801E-634DDDAF4B2B}" type="slidenum">
-              <a:t>‹Nº›</a:t>
+              <a:t>‹#›</a:t>
             </a:fld>
             <a:endParaRPr/>
           </a:p>
@@ -5317,8 +5437,8 @@
           </a:p>
         </p:txBody>
       </p:sp>
-      <mc:AlternateContent xmlns:mc="http://schemas.openxmlformats.org/markup-compatibility/2006">
-        <mc:Choice xmlns:a14="http://schemas.microsoft.com/office/drawing/2010/main" Requires="a14">
+      <mc:AlternateContent xmlns:mc="http://schemas.openxmlformats.org/markup-compatibility/2006" xmlns:a14="http://schemas.microsoft.com/office/drawing/2010/main">
+        <mc:Choice Requires="a14">
           <p:sp>
             <p:nvSpPr>
               <p:cNvPr id="4" name="Marcador de texto 2">
@@ -5552,7 +5672,7 @@
             </p:txBody>
           </p:sp>
         </mc:Choice>
-        <mc:Fallback>
+        <mc:Fallback xmlns="">
           <p:sp>
             <p:nvSpPr>
               <p:cNvPr id="4" name="Marcador de texto 2">
@@ -5723,6 +5843,227 @@
   <p:cSld>
     <p:spTree>
       <p:nvGrpSpPr>
+        <p:cNvPr id="1" name="">
+          <a:extLst>
+            <a:ext uri="{FF2B5EF4-FFF2-40B4-BE49-F238E27FC236}">
+              <a16:creationId xmlns:a16="http://schemas.microsoft.com/office/drawing/2014/main" id="{3AB099CE-A83E-4D36-3379-1B1D449454F0}"/>
+            </a:ext>
+          </a:extLst>
+        </p:cNvPr>
+        <p:cNvGrpSpPr/>
+        <p:nvPr/>
+      </p:nvGrpSpPr>
+      <p:grpSpPr>
+        <a:xfrm>
+          <a:off x="0" y="0"/>
+          <a:ext cx="0" cy="0"/>
+          <a:chOff x="0" y="0"/>
+          <a:chExt cx="0" cy="0"/>
+        </a:xfrm>
+      </p:grpSpPr>
+      <p:sp>
+        <p:nvSpPr>
+          <p:cNvPr id="16" name="object 16">
+            <a:extLst>
+              <a:ext uri="{FF2B5EF4-FFF2-40B4-BE49-F238E27FC236}">
+                <a16:creationId xmlns:a16="http://schemas.microsoft.com/office/drawing/2014/main" id="{912173D2-8888-9B94-0CD9-EC5F16659549}"/>
+              </a:ext>
+            </a:extLst>
+          </p:cNvPr>
+          <p:cNvSpPr txBox="1">
+            <a:spLocks noGrp="1"/>
+          </p:cNvSpPr>
+          <p:nvPr>
+            <p:ph type="title"/>
+          </p:nvPr>
+        </p:nvSpPr>
+        <p:spPr>
+          <a:xfrm>
+            <a:off x="685800" y="408883"/>
+            <a:ext cx="10994410" cy="397545"/>
+          </a:xfrm>
+          <a:prstGeom prst="rect">
+            <a:avLst/>
+          </a:prstGeom>
+        </p:spPr>
+        <p:txBody>
+          <a:bodyPr vert="horz" wrap="square" lIns="0" tIns="12700" rIns="0" bIns="0" rtlCol="0">
+            <a:spAutoFit/>
+          </a:bodyPr>
+          <a:lstStyle/>
+          <a:p>
+            <a:pPr marL="12700">
+              <a:lnSpc>
+                <a:spcPct val="100000"/>
+              </a:lnSpc>
+              <a:spcBef>
+                <a:spcPts val="100"/>
+              </a:spcBef>
+            </a:pPr>
+            <a:r>
+              <a:rPr lang="en-US" sz="2500" dirty="0"/>
+              <a:t>Learning outcome #2 – Multimode Interference (MMI) Coupler cross-section</a:t>
+            </a:r>
+            <a:endParaRPr lang="en-US" sz="2500" b="0" dirty="0">
+              <a:latin typeface="+mj-lt"/>
+              <a:cs typeface="Lucida Sans"/>
+            </a:endParaRPr>
+          </a:p>
+        </p:txBody>
+      </p:sp>
+      <p:pic>
+        <p:nvPicPr>
+          <p:cNvPr id="83" name="Gráfico 82">
+            <a:extLst>
+              <a:ext uri="{FF2B5EF4-FFF2-40B4-BE49-F238E27FC236}">
+                <a16:creationId xmlns:a16="http://schemas.microsoft.com/office/drawing/2014/main" id="{74C62BD7-4E6D-0E8F-1BF1-FCAFAC9F8343}"/>
+              </a:ext>
+            </a:extLst>
+          </p:cNvPr>
+          <p:cNvPicPr>
+            <a:picLocks noChangeAspect="1"/>
+          </p:cNvPicPr>
+          <p:nvPr/>
+        </p:nvPicPr>
+        <p:blipFill>
+          <a:blip r:embed="rId3">
+            <a:extLst>
+              <a:ext uri="{96DAC541-7B7A-43D3-8B79-37D633B846F1}">
+                <asvg:svgBlip xmlns:asvg="http://schemas.microsoft.com/office/drawing/2016/SVG/main" r:embed="rId4"/>
+              </a:ext>
+            </a:extLst>
+          </a:blip>
+          <a:stretch>
+            <a:fillRect/>
+          </a:stretch>
+        </p:blipFill>
+        <p:spPr>
+          <a:xfrm>
+            <a:off x="5045006" y="6356057"/>
+            <a:ext cx="6409575" cy="363174"/>
+          </a:xfrm>
+          <a:prstGeom prst="rect">
+            <a:avLst/>
+          </a:prstGeom>
+        </p:spPr>
+      </p:pic>
+      <p:sp>
+        <p:nvSpPr>
+          <p:cNvPr id="84" name="Marcador de número de diapositiva 83">
+            <a:extLst>
+              <a:ext uri="{FF2B5EF4-FFF2-40B4-BE49-F238E27FC236}">
+                <a16:creationId xmlns:a16="http://schemas.microsoft.com/office/drawing/2014/main" id="{6BF169CE-40B3-D116-0157-BDD5FDF7D888}"/>
+              </a:ext>
+            </a:extLst>
+          </p:cNvPr>
+          <p:cNvSpPr>
+            <a:spLocks noGrp="1"/>
+          </p:cNvSpPr>
+          <p:nvPr>
+            <p:ph type="sldNum" sz="quarter" idx="7"/>
+          </p:nvPr>
+        </p:nvSpPr>
+        <p:spPr/>
+        <p:txBody>
+          <a:bodyPr/>
+          <a:lstStyle/>
+          <a:p>
+            <a:fld id="{B6F15528-21DE-4FAA-801E-634DDDAF4B2B}" type="slidenum">
+              <a:rPr lang="es-ES" smtClean="0"/>
+              <a:t>5</a:t>
+            </a:fld>
+            <a:endParaRPr lang="es-ES"/>
+          </a:p>
+        </p:txBody>
+      </p:sp>
+      <p:sp>
+        <p:nvSpPr>
+          <p:cNvPr id="3" name="Marcador de pie de página 2">
+            <a:extLst>
+              <a:ext uri="{FF2B5EF4-FFF2-40B4-BE49-F238E27FC236}">
+                <a16:creationId xmlns:a16="http://schemas.microsoft.com/office/drawing/2014/main" id="{4B33E3E8-6A0F-8FC3-C2CE-318516DD8415}"/>
+              </a:ext>
+            </a:extLst>
+          </p:cNvPr>
+          <p:cNvSpPr>
+            <a:spLocks noGrp="1"/>
+          </p:cNvSpPr>
+          <p:nvPr>
+            <p:ph type="ftr" sz="quarter" idx="5"/>
+          </p:nvPr>
+        </p:nvSpPr>
+        <p:spPr/>
+        <p:txBody>
+          <a:bodyPr/>
+          <a:lstStyle/>
+          <a:p>
+            <a:pPr marL="12700">
+              <a:spcBef>
+                <a:spcPts val="15"/>
+              </a:spcBef>
+            </a:pPr>
+            <a:r>
+              <a:rPr lang="es-ES" spc="-5"/>
+              <a:t>LAB 0.2. COUPLERS</a:t>
+            </a:r>
+            <a:endParaRPr lang="es-ES" spc="-5" dirty="0"/>
+          </a:p>
+        </p:txBody>
+      </p:sp>
+      <p:pic>
+        <p:nvPicPr>
+          <p:cNvPr id="6" name="Picture 5">
+            <a:extLst>
+              <a:ext uri="{FF2B5EF4-FFF2-40B4-BE49-F238E27FC236}">
+                <a16:creationId xmlns:a16="http://schemas.microsoft.com/office/drawing/2014/main" id="{12B20D7D-A5F4-5E2D-CBE4-B34095DBFE76}"/>
+              </a:ext>
+            </a:extLst>
+          </p:cNvPr>
+          <p:cNvPicPr>
+            <a:picLocks noChangeAspect="1"/>
+          </p:cNvPicPr>
+          <p:nvPr/>
+        </p:nvPicPr>
+        <p:blipFill>
+          <a:blip r:embed="rId5">
+            <a:extLst>
+              <a:ext uri="{28A0092B-C50C-407E-A947-70E740481C1C}">
+                <a14:useLocalDpi xmlns:a14="http://schemas.microsoft.com/office/drawing/2010/main" val="0"/>
+              </a:ext>
+            </a:extLst>
+          </a:blip>
+          <a:stretch>
+            <a:fillRect/>
+          </a:stretch>
+        </p:blipFill>
+        <p:spPr>
+          <a:xfrm>
+            <a:off x="1981200" y="1066800"/>
+            <a:ext cx="7671831" cy="4480569"/>
+          </a:xfrm>
+          <a:prstGeom prst="rect">
+            <a:avLst/>
+          </a:prstGeom>
+        </p:spPr>
+      </p:pic>
+    </p:spTree>
+    <p:extLst>
+      <p:ext uri="{BB962C8B-B14F-4D97-AF65-F5344CB8AC3E}">
+        <p14:creationId xmlns:p14="http://schemas.microsoft.com/office/powerpoint/2010/main" val="3314494187"/>
+      </p:ext>
+    </p:extLst>
+  </p:cSld>
+  <p:clrMapOvr>
+    <a:masterClrMapping/>
+  </p:clrMapOvr>
+</p:sld>
+</file>
+
+<file path=ppt/slides/slide6.xml><?xml version="1.0" encoding="utf-8"?>
+<p:sld xmlns:a="http://schemas.openxmlformats.org/drawingml/2006/main" xmlns:r="http://schemas.openxmlformats.org/officeDocument/2006/relationships" xmlns:p="http://schemas.openxmlformats.org/presentationml/2006/main">
+  <p:cSld>
+    <p:spTree>
+      <p:nvGrpSpPr>
         <p:cNvPr id="1" name=""/>
         <p:cNvGrpSpPr/>
         <p:nvPr/>
@@ -5857,7 +6198,7 @@
           <a:p>
             <a:fld id="{B6F15528-21DE-4FAA-801E-634DDDAF4B2B}" type="slidenum">
               <a:rPr lang="es-ES" smtClean="0"/>
-              <a:t>5</a:t>
+              <a:t>6</a:t>
             </a:fld>
             <a:endParaRPr lang="es-ES"/>
           </a:p>

--- a/LabBook_020.pptx
+++ b/LabBook_020.pptx
@@ -298,7 +298,7 @@
           <a:p>
             <a:fld id="{8438F8DC-35B0-48E6-A86E-42F1F08DD00F}" type="datetimeFigureOut">
               <a:rPr lang="es-ES" smtClean="0"/>
-              <a:t>16/02/2026</a:t>
+              <a:t>02/03/2026</a:t>
             </a:fld>
             <a:endParaRPr lang="es-ES"/>
           </a:p>
@@ -475,7 +475,7 @@
           <a:p>
             <a:fld id="{FACBDC12-F39B-4B97-8F4D-6734F9D366FF}" type="datetimeFigureOut">
               <a:rPr lang="es-ES" smtClean="0"/>
-              <a:t>16/02/2026</a:t>
+              <a:t>02/03/2026</a:t>
             </a:fld>
             <a:endParaRPr lang="es-ES"/>
           </a:p>

--- a/LabBook_020.pptx
+++ b/LabBook_020.pptx
@@ -5,18 +5,22 @@
     <p:sldMasterId id="2147483648" r:id="rId1"/>
   </p:sldMasterIdLst>
   <p:notesMasterIdLst>
-    <p:notesMasterId r:id="rId8"/>
+    <p:notesMasterId r:id="rId12"/>
   </p:notesMasterIdLst>
   <p:handoutMasterIdLst>
-    <p:handoutMasterId r:id="rId9"/>
+    <p:handoutMasterId r:id="rId13"/>
   </p:handoutMasterIdLst>
   <p:sldIdLst>
     <p:sldId id="256" r:id="rId2"/>
     <p:sldId id="289" r:id="rId3"/>
     <p:sldId id="290" r:id="rId4"/>
-    <p:sldId id="293" r:id="rId5"/>
-    <p:sldId id="294" r:id="rId6"/>
-    <p:sldId id="288" r:id="rId7"/>
+    <p:sldId id="295" r:id="rId5"/>
+    <p:sldId id="296" r:id="rId6"/>
+    <p:sldId id="293" r:id="rId7"/>
+    <p:sldId id="297" r:id="rId8"/>
+    <p:sldId id="298" r:id="rId9"/>
+    <p:sldId id="294" r:id="rId10"/>
+    <p:sldId id="288" r:id="rId11"/>
   </p:sldIdLst>
   <p:sldSz cx="12192000" cy="6858000"/>
   <p:notesSz cx="12192000" cy="6858000"/>
@@ -834,6 +838,222 @@
         <p:cNvPr id="1" name="">
           <a:extLst>
             <a:ext uri="{FF2B5EF4-FFF2-40B4-BE49-F238E27FC236}">
+              <a16:creationId xmlns:a16="http://schemas.microsoft.com/office/drawing/2014/main" id="{A62CE0A9-150E-0ADB-2765-67B0CCABEADA}"/>
+            </a:ext>
+          </a:extLst>
+        </p:cNvPr>
+        <p:cNvGrpSpPr/>
+        <p:nvPr/>
+      </p:nvGrpSpPr>
+      <p:grpSpPr>
+        <a:xfrm>
+          <a:off x="0" y="0"/>
+          <a:ext cx="0" cy="0"/>
+          <a:chOff x="0" y="0"/>
+          <a:chExt cx="0" cy="0"/>
+        </a:xfrm>
+      </p:grpSpPr>
+      <p:sp>
+        <p:nvSpPr>
+          <p:cNvPr id="2" name="Marcador de imagen de diapositiva 1">
+            <a:extLst>
+              <a:ext uri="{FF2B5EF4-FFF2-40B4-BE49-F238E27FC236}">
+                <a16:creationId xmlns:a16="http://schemas.microsoft.com/office/drawing/2014/main" id="{526124BC-9704-8425-BB2A-DD89B6946E6F}"/>
+              </a:ext>
+            </a:extLst>
+          </p:cNvPr>
+          <p:cNvSpPr>
+            <a:spLocks noGrp="1" noRot="1" noChangeAspect="1"/>
+          </p:cNvSpPr>
+          <p:nvPr>
+            <p:ph type="sldImg"/>
+          </p:nvPr>
+        </p:nvSpPr>
+        <p:spPr/>
+      </p:sp>
+      <p:sp>
+        <p:nvSpPr>
+          <p:cNvPr id="3" name="Marcador de notas 2">
+            <a:extLst>
+              <a:ext uri="{FF2B5EF4-FFF2-40B4-BE49-F238E27FC236}">
+                <a16:creationId xmlns:a16="http://schemas.microsoft.com/office/drawing/2014/main" id="{06D10526-984C-5FE2-48BE-115CCB3F7756}"/>
+              </a:ext>
+            </a:extLst>
+          </p:cNvPr>
+          <p:cNvSpPr>
+            <a:spLocks noGrp="1"/>
+          </p:cNvSpPr>
+          <p:nvPr>
+            <p:ph type="body" idx="1"/>
+          </p:nvPr>
+        </p:nvSpPr>
+        <p:spPr/>
+        <p:txBody>
+          <a:bodyPr/>
+          <a:lstStyle/>
+          <a:p>
+            <a:endParaRPr lang="es-ES" dirty="0"/>
+          </a:p>
+        </p:txBody>
+      </p:sp>
+      <p:sp>
+        <p:nvSpPr>
+          <p:cNvPr id="4" name="Marcador de número de diapositiva 3">
+            <a:extLst>
+              <a:ext uri="{FF2B5EF4-FFF2-40B4-BE49-F238E27FC236}">
+                <a16:creationId xmlns:a16="http://schemas.microsoft.com/office/drawing/2014/main" id="{BEA24616-5D95-0B1E-3E33-445F970E28BD}"/>
+              </a:ext>
+            </a:extLst>
+          </p:cNvPr>
+          <p:cNvSpPr>
+            <a:spLocks noGrp="1"/>
+          </p:cNvSpPr>
+          <p:nvPr>
+            <p:ph type="sldNum" sz="quarter" idx="5"/>
+          </p:nvPr>
+        </p:nvSpPr>
+        <p:spPr/>
+        <p:txBody>
+          <a:bodyPr/>
+          <a:lstStyle/>
+          <a:p>
+            <a:fld id="{676223B9-C868-4436-87D9-1A3152E1157A}" type="slidenum">
+              <a:rPr lang="es-ES" smtClean="0"/>
+              <a:t>4</a:t>
+            </a:fld>
+            <a:endParaRPr lang="es-ES"/>
+          </a:p>
+        </p:txBody>
+      </p:sp>
+    </p:spTree>
+    <p:extLst>
+      <p:ext uri="{BB962C8B-B14F-4D97-AF65-F5344CB8AC3E}">
+        <p14:creationId xmlns:p14="http://schemas.microsoft.com/office/powerpoint/2010/main" val="2747659704"/>
+      </p:ext>
+    </p:extLst>
+  </p:cSld>
+  <p:clrMapOvr>
+    <a:masterClrMapping/>
+  </p:clrMapOvr>
+</p:notes>
+</file>
+
+<file path=ppt/notesSlides/notesSlide3.xml><?xml version="1.0" encoding="utf-8"?>
+<p:notes xmlns:a="http://schemas.openxmlformats.org/drawingml/2006/main" xmlns:r="http://schemas.openxmlformats.org/officeDocument/2006/relationships" xmlns:p="http://schemas.openxmlformats.org/presentationml/2006/main">
+  <p:cSld>
+    <p:spTree>
+      <p:nvGrpSpPr>
+        <p:cNvPr id="1" name="">
+          <a:extLst>
+            <a:ext uri="{FF2B5EF4-FFF2-40B4-BE49-F238E27FC236}">
+              <a16:creationId xmlns:a16="http://schemas.microsoft.com/office/drawing/2014/main" id="{4812867E-EB72-EE97-C63B-9829C90409C5}"/>
+            </a:ext>
+          </a:extLst>
+        </p:cNvPr>
+        <p:cNvGrpSpPr/>
+        <p:nvPr/>
+      </p:nvGrpSpPr>
+      <p:grpSpPr>
+        <a:xfrm>
+          <a:off x="0" y="0"/>
+          <a:ext cx="0" cy="0"/>
+          <a:chOff x="0" y="0"/>
+          <a:chExt cx="0" cy="0"/>
+        </a:xfrm>
+      </p:grpSpPr>
+      <p:sp>
+        <p:nvSpPr>
+          <p:cNvPr id="2" name="Marcador de imagen de diapositiva 1">
+            <a:extLst>
+              <a:ext uri="{FF2B5EF4-FFF2-40B4-BE49-F238E27FC236}">
+                <a16:creationId xmlns:a16="http://schemas.microsoft.com/office/drawing/2014/main" id="{EFC64014-7240-8AFD-B13E-9E46D97F7979}"/>
+              </a:ext>
+            </a:extLst>
+          </p:cNvPr>
+          <p:cNvSpPr>
+            <a:spLocks noGrp="1" noRot="1" noChangeAspect="1"/>
+          </p:cNvSpPr>
+          <p:nvPr>
+            <p:ph type="sldImg"/>
+          </p:nvPr>
+        </p:nvSpPr>
+        <p:spPr/>
+      </p:sp>
+      <p:sp>
+        <p:nvSpPr>
+          <p:cNvPr id="3" name="Marcador de notas 2">
+            <a:extLst>
+              <a:ext uri="{FF2B5EF4-FFF2-40B4-BE49-F238E27FC236}">
+                <a16:creationId xmlns:a16="http://schemas.microsoft.com/office/drawing/2014/main" id="{4BD83962-EF63-672C-6471-D17532DDEB00}"/>
+              </a:ext>
+            </a:extLst>
+          </p:cNvPr>
+          <p:cNvSpPr>
+            <a:spLocks noGrp="1"/>
+          </p:cNvSpPr>
+          <p:nvPr>
+            <p:ph type="body" idx="1"/>
+          </p:nvPr>
+        </p:nvSpPr>
+        <p:spPr/>
+        <p:txBody>
+          <a:bodyPr/>
+          <a:lstStyle/>
+          <a:p>
+            <a:endParaRPr lang="es-ES" dirty="0"/>
+          </a:p>
+        </p:txBody>
+      </p:sp>
+      <p:sp>
+        <p:nvSpPr>
+          <p:cNvPr id="4" name="Marcador de número de diapositiva 3">
+            <a:extLst>
+              <a:ext uri="{FF2B5EF4-FFF2-40B4-BE49-F238E27FC236}">
+                <a16:creationId xmlns:a16="http://schemas.microsoft.com/office/drawing/2014/main" id="{CBACE1BF-E991-81CA-24A1-6C541448F950}"/>
+              </a:ext>
+            </a:extLst>
+          </p:cNvPr>
+          <p:cNvSpPr>
+            <a:spLocks noGrp="1"/>
+          </p:cNvSpPr>
+          <p:nvPr>
+            <p:ph type="sldNum" sz="quarter" idx="5"/>
+          </p:nvPr>
+        </p:nvSpPr>
+        <p:spPr/>
+        <p:txBody>
+          <a:bodyPr/>
+          <a:lstStyle/>
+          <a:p>
+            <a:fld id="{676223B9-C868-4436-87D9-1A3152E1157A}" type="slidenum">
+              <a:rPr lang="es-ES" smtClean="0"/>
+              <a:t>5</a:t>
+            </a:fld>
+            <a:endParaRPr lang="es-ES"/>
+          </a:p>
+        </p:txBody>
+      </p:sp>
+    </p:spTree>
+    <p:extLst>
+      <p:ext uri="{BB962C8B-B14F-4D97-AF65-F5344CB8AC3E}">
+        <p14:creationId xmlns:p14="http://schemas.microsoft.com/office/powerpoint/2010/main" val="4197466416"/>
+      </p:ext>
+    </p:extLst>
+  </p:cSld>
+  <p:clrMapOvr>
+    <a:masterClrMapping/>
+  </p:clrMapOvr>
+</p:notes>
+</file>
+
+<file path=ppt/notesSlides/notesSlide4.xml><?xml version="1.0" encoding="utf-8"?>
+<p:notes xmlns:a="http://schemas.openxmlformats.org/drawingml/2006/main" xmlns:r="http://schemas.openxmlformats.org/officeDocument/2006/relationships" xmlns:p="http://schemas.openxmlformats.org/presentationml/2006/main">
+  <p:cSld>
+    <p:spTree>
+      <p:nvGrpSpPr>
+        <p:cNvPr id="1" name="">
+          <a:extLst>
+            <a:ext uri="{FF2B5EF4-FFF2-40B4-BE49-F238E27FC236}">
               <a16:creationId xmlns:a16="http://schemas.microsoft.com/office/drawing/2014/main" id="{7B023B86-D15F-9CD8-C5EA-3EAAD8BACCF7}"/>
             </a:ext>
           </a:extLst>
@@ -915,7 +1135,7 @@
           <a:p>
             <a:fld id="{676223B9-C868-4436-87D9-1A3152E1157A}" type="slidenum">
               <a:rPr lang="es-ES" smtClean="0"/>
-              <a:t>4</a:t>
+              <a:t>6</a:t>
             </a:fld>
             <a:endParaRPr lang="es-ES"/>
           </a:p>
@@ -934,7 +1154,223 @@
 </p:notes>
 </file>
 
-<file path=ppt/notesSlides/notesSlide3.xml><?xml version="1.0" encoding="utf-8"?>
+<file path=ppt/notesSlides/notesSlide5.xml><?xml version="1.0" encoding="utf-8"?>
+<p:notes xmlns:a="http://schemas.openxmlformats.org/drawingml/2006/main" xmlns:r="http://schemas.openxmlformats.org/officeDocument/2006/relationships" xmlns:p="http://schemas.openxmlformats.org/presentationml/2006/main">
+  <p:cSld>
+    <p:spTree>
+      <p:nvGrpSpPr>
+        <p:cNvPr id="1" name="">
+          <a:extLst>
+            <a:ext uri="{FF2B5EF4-FFF2-40B4-BE49-F238E27FC236}">
+              <a16:creationId xmlns:a16="http://schemas.microsoft.com/office/drawing/2014/main" id="{72343086-1A8A-462C-6E53-3A5ED986CE11}"/>
+            </a:ext>
+          </a:extLst>
+        </p:cNvPr>
+        <p:cNvGrpSpPr/>
+        <p:nvPr/>
+      </p:nvGrpSpPr>
+      <p:grpSpPr>
+        <a:xfrm>
+          <a:off x="0" y="0"/>
+          <a:ext cx="0" cy="0"/>
+          <a:chOff x="0" y="0"/>
+          <a:chExt cx="0" cy="0"/>
+        </a:xfrm>
+      </p:grpSpPr>
+      <p:sp>
+        <p:nvSpPr>
+          <p:cNvPr id="2" name="Marcador de imagen de diapositiva 1">
+            <a:extLst>
+              <a:ext uri="{FF2B5EF4-FFF2-40B4-BE49-F238E27FC236}">
+                <a16:creationId xmlns:a16="http://schemas.microsoft.com/office/drawing/2014/main" id="{02874456-09F3-B440-63F6-61703D6773A3}"/>
+              </a:ext>
+            </a:extLst>
+          </p:cNvPr>
+          <p:cNvSpPr>
+            <a:spLocks noGrp="1" noRot="1" noChangeAspect="1"/>
+          </p:cNvSpPr>
+          <p:nvPr>
+            <p:ph type="sldImg"/>
+          </p:nvPr>
+        </p:nvSpPr>
+        <p:spPr/>
+      </p:sp>
+      <p:sp>
+        <p:nvSpPr>
+          <p:cNvPr id="3" name="Marcador de notas 2">
+            <a:extLst>
+              <a:ext uri="{FF2B5EF4-FFF2-40B4-BE49-F238E27FC236}">
+                <a16:creationId xmlns:a16="http://schemas.microsoft.com/office/drawing/2014/main" id="{414629C4-9B5F-6F8F-67DF-38AD83632950}"/>
+              </a:ext>
+            </a:extLst>
+          </p:cNvPr>
+          <p:cNvSpPr>
+            <a:spLocks noGrp="1"/>
+          </p:cNvSpPr>
+          <p:nvPr>
+            <p:ph type="body" idx="1"/>
+          </p:nvPr>
+        </p:nvSpPr>
+        <p:spPr/>
+        <p:txBody>
+          <a:bodyPr/>
+          <a:lstStyle/>
+          <a:p>
+            <a:endParaRPr lang="es-ES" dirty="0"/>
+          </a:p>
+        </p:txBody>
+      </p:sp>
+      <p:sp>
+        <p:nvSpPr>
+          <p:cNvPr id="4" name="Marcador de número de diapositiva 3">
+            <a:extLst>
+              <a:ext uri="{FF2B5EF4-FFF2-40B4-BE49-F238E27FC236}">
+                <a16:creationId xmlns:a16="http://schemas.microsoft.com/office/drawing/2014/main" id="{CC4B5056-175D-721F-EE93-6F5A203EACFA}"/>
+              </a:ext>
+            </a:extLst>
+          </p:cNvPr>
+          <p:cNvSpPr>
+            <a:spLocks noGrp="1"/>
+          </p:cNvSpPr>
+          <p:nvPr>
+            <p:ph type="sldNum" sz="quarter" idx="5"/>
+          </p:nvPr>
+        </p:nvSpPr>
+        <p:spPr/>
+        <p:txBody>
+          <a:bodyPr/>
+          <a:lstStyle/>
+          <a:p>
+            <a:fld id="{676223B9-C868-4436-87D9-1A3152E1157A}" type="slidenum">
+              <a:rPr lang="es-ES" smtClean="0"/>
+              <a:t>7</a:t>
+            </a:fld>
+            <a:endParaRPr lang="es-ES"/>
+          </a:p>
+        </p:txBody>
+      </p:sp>
+    </p:spTree>
+    <p:extLst>
+      <p:ext uri="{BB962C8B-B14F-4D97-AF65-F5344CB8AC3E}">
+        <p14:creationId xmlns:p14="http://schemas.microsoft.com/office/powerpoint/2010/main" val="3166016363"/>
+      </p:ext>
+    </p:extLst>
+  </p:cSld>
+  <p:clrMapOvr>
+    <a:masterClrMapping/>
+  </p:clrMapOvr>
+</p:notes>
+</file>
+
+<file path=ppt/notesSlides/notesSlide6.xml><?xml version="1.0" encoding="utf-8"?>
+<p:notes xmlns:a="http://schemas.openxmlformats.org/drawingml/2006/main" xmlns:r="http://schemas.openxmlformats.org/officeDocument/2006/relationships" xmlns:p="http://schemas.openxmlformats.org/presentationml/2006/main">
+  <p:cSld>
+    <p:spTree>
+      <p:nvGrpSpPr>
+        <p:cNvPr id="1" name="">
+          <a:extLst>
+            <a:ext uri="{FF2B5EF4-FFF2-40B4-BE49-F238E27FC236}">
+              <a16:creationId xmlns:a16="http://schemas.microsoft.com/office/drawing/2014/main" id="{B77CDD6A-3F98-8AF1-6592-F38EFBE80A6C}"/>
+            </a:ext>
+          </a:extLst>
+        </p:cNvPr>
+        <p:cNvGrpSpPr/>
+        <p:nvPr/>
+      </p:nvGrpSpPr>
+      <p:grpSpPr>
+        <a:xfrm>
+          <a:off x="0" y="0"/>
+          <a:ext cx="0" cy="0"/>
+          <a:chOff x="0" y="0"/>
+          <a:chExt cx="0" cy="0"/>
+        </a:xfrm>
+      </p:grpSpPr>
+      <p:sp>
+        <p:nvSpPr>
+          <p:cNvPr id="2" name="Marcador de imagen de diapositiva 1">
+            <a:extLst>
+              <a:ext uri="{FF2B5EF4-FFF2-40B4-BE49-F238E27FC236}">
+                <a16:creationId xmlns:a16="http://schemas.microsoft.com/office/drawing/2014/main" id="{6B4AD5CF-3531-D202-C57F-9C006ABD841E}"/>
+              </a:ext>
+            </a:extLst>
+          </p:cNvPr>
+          <p:cNvSpPr>
+            <a:spLocks noGrp="1" noRot="1" noChangeAspect="1"/>
+          </p:cNvSpPr>
+          <p:nvPr>
+            <p:ph type="sldImg"/>
+          </p:nvPr>
+        </p:nvSpPr>
+        <p:spPr/>
+      </p:sp>
+      <p:sp>
+        <p:nvSpPr>
+          <p:cNvPr id="3" name="Marcador de notas 2">
+            <a:extLst>
+              <a:ext uri="{FF2B5EF4-FFF2-40B4-BE49-F238E27FC236}">
+                <a16:creationId xmlns:a16="http://schemas.microsoft.com/office/drawing/2014/main" id="{79BACF69-0044-FDEA-574E-5B159EFEC414}"/>
+              </a:ext>
+            </a:extLst>
+          </p:cNvPr>
+          <p:cNvSpPr>
+            <a:spLocks noGrp="1"/>
+          </p:cNvSpPr>
+          <p:nvPr>
+            <p:ph type="body" idx="1"/>
+          </p:nvPr>
+        </p:nvSpPr>
+        <p:spPr/>
+        <p:txBody>
+          <a:bodyPr/>
+          <a:lstStyle/>
+          <a:p>
+            <a:endParaRPr lang="es-ES" dirty="0"/>
+          </a:p>
+        </p:txBody>
+      </p:sp>
+      <p:sp>
+        <p:nvSpPr>
+          <p:cNvPr id="4" name="Marcador de número de diapositiva 3">
+            <a:extLst>
+              <a:ext uri="{FF2B5EF4-FFF2-40B4-BE49-F238E27FC236}">
+                <a16:creationId xmlns:a16="http://schemas.microsoft.com/office/drawing/2014/main" id="{EBF47826-57FF-64E1-7B7E-A48032521225}"/>
+              </a:ext>
+            </a:extLst>
+          </p:cNvPr>
+          <p:cNvSpPr>
+            <a:spLocks noGrp="1"/>
+          </p:cNvSpPr>
+          <p:nvPr>
+            <p:ph type="sldNum" sz="quarter" idx="5"/>
+          </p:nvPr>
+        </p:nvSpPr>
+        <p:spPr/>
+        <p:txBody>
+          <a:bodyPr/>
+          <a:lstStyle/>
+          <a:p>
+            <a:fld id="{676223B9-C868-4436-87D9-1A3152E1157A}" type="slidenum">
+              <a:rPr lang="es-ES" smtClean="0"/>
+              <a:t>8</a:t>
+            </a:fld>
+            <a:endParaRPr lang="es-ES"/>
+          </a:p>
+        </p:txBody>
+      </p:sp>
+    </p:spTree>
+    <p:extLst>
+      <p:ext uri="{BB962C8B-B14F-4D97-AF65-F5344CB8AC3E}">
+        <p14:creationId xmlns:p14="http://schemas.microsoft.com/office/powerpoint/2010/main" val="1436624933"/>
+      </p:ext>
+    </p:extLst>
+  </p:cSld>
+  <p:clrMapOvr>
+    <a:masterClrMapping/>
+  </p:clrMapOvr>
+</p:notes>
+</file>
+
+<file path=ppt/notesSlides/notesSlide7.xml><?xml version="1.0" encoding="utf-8"?>
 <p:notes xmlns:a="http://schemas.openxmlformats.org/drawingml/2006/main" xmlns:r="http://schemas.openxmlformats.org/officeDocument/2006/relationships" xmlns:p="http://schemas.openxmlformats.org/presentationml/2006/main">
   <p:cSld>
     <p:spTree>
@@ -1034,7 +1470,7 @@
           <a:p>
             <a:fld id="{676223B9-C868-4436-87D9-1A3152E1157A}" type="slidenum">
               <a:rPr lang="es-ES" smtClean="0"/>
-              <a:t>5</a:t>
+              <a:t>9</a:t>
             </a:fld>
             <a:endParaRPr lang="es-ES"/>
           </a:p>
@@ -2645,6 +3081,159 @@
 </p:sld>
 </file>
 
+<file path=ppt/slides/slide10.xml><?xml version="1.0" encoding="utf-8"?>
+<p:sld xmlns:a="http://schemas.openxmlformats.org/drawingml/2006/main" xmlns:r="http://schemas.openxmlformats.org/officeDocument/2006/relationships" xmlns:p="http://schemas.openxmlformats.org/presentationml/2006/main">
+  <p:cSld>
+    <p:spTree>
+      <p:nvGrpSpPr>
+        <p:cNvPr id="1" name=""/>
+        <p:cNvGrpSpPr/>
+        <p:nvPr/>
+      </p:nvGrpSpPr>
+      <p:grpSpPr>
+        <a:xfrm>
+          <a:off x="0" y="0"/>
+          <a:ext cx="0" cy="0"/>
+          <a:chOff x="0" y="0"/>
+          <a:chExt cx="0" cy="0"/>
+        </a:xfrm>
+      </p:grpSpPr>
+      <p:sp>
+        <p:nvSpPr>
+          <p:cNvPr id="3" name="object 3"/>
+          <p:cNvSpPr/>
+          <p:nvPr/>
+        </p:nvSpPr>
+        <p:spPr>
+          <a:xfrm>
+            <a:off x="3945635" y="2636520"/>
+            <a:ext cx="8246363" cy="1584959"/>
+          </a:xfrm>
+          <a:prstGeom prst="rect">
+            <a:avLst/>
+          </a:prstGeom>
+          <a:blipFill>
+            <a:blip r:embed="rId2" cstate="print"/>
+            <a:stretch>
+              <a:fillRect/>
+            </a:stretch>
+          </a:blipFill>
+        </p:spPr>
+        <p:txBody>
+          <a:bodyPr wrap="square" lIns="0" tIns="0" rIns="0" bIns="0" rtlCol="0"/>
+          <a:lstStyle/>
+          <a:p>
+            <a:endParaRPr/>
+          </a:p>
+        </p:txBody>
+      </p:sp>
+      <p:sp>
+        <p:nvSpPr>
+          <p:cNvPr id="4" name="object 4"/>
+          <p:cNvSpPr txBox="1">
+            <a:spLocks noGrp="1"/>
+          </p:cNvSpPr>
+          <p:nvPr>
+            <p:ph type="title"/>
+          </p:nvPr>
+        </p:nvSpPr>
+        <p:spPr>
+          <a:xfrm>
+            <a:off x="4513326" y="3165729"/>
+            <a:ext cx="2233295" cy="513715"/>
+          </a:xfrm>
+          <a:prstGeom prst="rect">
+            <a:avLst/>
+          </a:prstGeom>
+        </p:spPr>
+        <p:txBody>
+          <a:bodyPr vert="horz" wrap="square" lIns="0" tIns="13335" rIns="0" bIns="0" rtlCol="0">
+            <a:spAutoFit/>
+          </a:bodyPr>
+          <a:lstStyle/>
+          <a:p>
+            <a:pPr marL="12700">
+              <a:lnSpc>
+                <a:spcPct val="100000"/>
+              </a:lnSpc>
+              <a:spcBef>
+                <a:spcPts val="105"/>
+              </a:spcBef>
+            </a:pPr>
+            <a:r>
+              <a:rPr sz="3200" b="1" spc="-5" dirty="0">
+                <a:solidFill>
+                  <a:srgbClr val="FFFFFF"/>
+                </a:solidFill>
+                <a:latin typeface="Lucida Sans"/>
+                <a:cs typeface="Lucida Sans"/>
+              </a:rPr>
+              <a:t>Thank</a:t>
+            </a:r>
+            <a:r>
+              <a:rPr sz="3200" b="1" spc="-55" dirty="0">
+                <a:solidFill>
+                  <a:srgbClr val="FFFFFF"/>
+                </a:solidFill>
+                <a:latin typeface="Lucida Sans"/>
+                <a:cs typeface="Lucida Sans"/>
+              </a:rPr>
+              <a:t> </a:t>
+            </a:r>
+            <a:r>
+              <a:rPr sz="3200" b="1" dirty="0">
+                <a:solidFill>
+                  <a:srgbClr val="FFFFFF"/>
+                </a:solidFill>
+                <a:latin typeface="Lucida Sans"/>
+                <a:cs typeface="Lucida Sans"/>
+              </a:rPr>
+              <a:t>you</a:t>
+            </a:r>
+            <a:endParaRPr sz="3200">
+              <a:latin typeface="Lucida Sans"/>
+              <a:cs typeface="Lucida Sans"/>
+            </a:endParaRPr>
+          </a:p>
+        </p:txBody>
+      </p:sp>
+      <p:sp>
+        <p:nvSpPr>
+          <p:cNvPr id="5" name="Marcador de número de diapositiva 4">
+            <a:extLst>
+              <a:ext uri="{FF2B5EF4-FFF2-40B4-BE49-F238E27FC236}">
+                <a16:creationId xmlns:a16="http://schemas.microsoft.com/office/drawing/2014/main" id="{B052DA19-AD24-7D24-2AE9-51F8F5A7F5E0}"/>
+              </a:ext>
+            </a:extLst>
+          </p:cNvPr>
+          <p:cNvSpPr>
+            <a:spLocks noGrp="1"/>
+          </p:cNvSpPr>
+          <p:nvPr>
+            <p:ph type="sldNum" sz="quarter" idx="7"/>
+          </p:nvPr>
+        </p:nvSpPr>
+        <p:spPr/>
+        <p:txBody>
+          <a:bodyPr/>
+          <a:lstStyle/>
+          <a:p>
+            <a:fld id="{B6F15528-21DE-4FAA-801E-634DDDAF4B2B}" type="slidenum">
+              <a:rPr lang="es-ES" smtClean="0"/>
+              <a:t>10</a:t>
+            </a:fld>
+            <a:endParaRPr lang="es-ES"/>
+          </a:p>
+        </p:txBody>
+      </p:sp>
+    </p:spTree>
+  </p:cSld>
+  <p:clrMapOvr>
+    <a:masterClrMapping/>
+  </p:clrMapOvr>
+</p:sld>
+</file>
+
 <file path=ppt/slides/slide2.xml><?xml version="1.0" encoding="utf-8"?>
 <p:sld xmlns:a="http://schemas.openxmlformats.org/drawingml/2006/main" xmlns:r="http://schemas.openxmlformats.org/officeDocument/2006/relationships" xmlns:p="http://schemas.openxmlformats.org/presentationml/2006/main">
   <p:cSld>
@@ -5144,114 +5733,1329 @@
           </p:sp>
         </mc:Fallback>
       </mc:AlternateContent>
-      <p:sp>
-        <p:nvSpPr>
-          <p:cNvPr id="2" name="CuadroTexto 1">
-            <a:extLst>
-              <a:ext uri="{FF2B5EF4-FFF2-40B4-BE49-F238E27FC236}">
-                <a16:creationId xmlns:a16="http://schemas.microsoft.com/office/drawing/2014/main" id="{D0F8CF3B-B920-DBFC-F825-0C87B51EADA7}"/>
-              </a:ext>
-            </a:extLst>
-          </p:cNvPr>
-          <p:cNvSpPr txBox="1"/>
-          <p:nvPr/>
-        </p:nvSpPr>
-        <p:spPr>
-          <a:xfrm>
-            <a:off x="609441" y="4860334"/>
-            <a:ext cx="11199971" cy="1200329"/>
-          </a:xfrm>
-          <a:prstGeom prst="rect">
-            <a:avLst/>
-          </a:prstGeom>
-          <a:solidFill>
-            <a:schemeClr val="bg1">
-              <a:lumMod val="95000"/>
-            </a:schemeClr>
-          </a:solidFill>
-          <a:ln w="28575">
-            <a:solidFill>
-              <a:srgbClr val="E0700D"/>
-            </a:solidFill>
-          </a:ln>
-        </p:spPr>
-        <p:txBody>
-          <a:bodyPr wrap="square" rtlCol="0">
-            <a:spAutoFit/>
-          </a:bodyPr>
-          <a:lstStyle/>
-          <a:p>
-            <a:pPr algn="just"/>
-            <a:r>
-              <a:rPr lang="en-US" sz="1200" dirty="0">
-                <a:latin typeface="Arial" panose="020B0604020202020204" pitchFamily="34" charset="0"/>
-                <a:cs typeface="Arial" panose="020B0604020202020204" pitchFamily="34" charset="0"/>
-              </a:rPr>
-              <a:t>Document all your results (neff, plot fields </a:t>
-            </a:r>
-            <a:r>
-              <a:rPr lang="en-US" sz="1200">
-                <a:latin typeface="Arial" panose="020B0604020202020204" pitchFamily="34" charset="0"/>
-                <a:cs typeface="Arial" panose="020B0604020202020204" pitchFamily="34" charset="0"/>
-              </a:rPr>
-              <a:t>of different modes, </a:t>
-            </a:r>
-            <a:r>
-              <a:rPr lang="en-US" sz="1200" dirty="0">
-                <a:latin typeface="Arial" panose="020B0604020202020204" pitchFamily="34" charset="0"/>
-                <a:cs typeface="Arial" panose="020B0604020202020204" pitchFamily="34" charset="0"/>
-              </a:rPr>
-              <a:t>comparison between </a:t>
-            </a:r>
-            <a:r>
-              <a:rPr lang="en-US" sz="1200">
-                <a:latin typeface="Arial" panose="020B0604020202020204" pitchFamily="34" charset="0"/>
-                <a:cs typeface="Arial" panose="020B0604020202020204" pitchFamily="34" charset="0"/>
-              </a:rPr>
-              <a:t>different polarizations…)</a:t>
-            </a:r>
-            <a:endParaRPr lang="en-US" sz="1200" dirty="0">
-              <a:latin typeface="Arial" panose="020B0604020202020204" pitchFamily="34" charset="0"/>
-              <a:cs typeface="Arial" panose="020B0604020202020204" pitchFamily="34" charset="0"/>
-            </a:endParaRPr>
-          </a:p>
-          <a:p>
-            <a:pPr algn="just"/>
-            <a:endParaRPr lang="en-US" sz="1200" dirty="0">
-              <a:latin typeface="Arial" panose="020B0604020202020204" pitchFamily="34" charset="0"/>
-              <a:cs typeface="Arial" panose="020B0604020202020204" pitchFamily="34" charset="0"/>
-            </a:endParaRPr>
-          </a:p>
-          <a:p>
-            <a:pPr algn="just"/>
-            <a:endParaRPr lang="en-US" sz="1200" dirty="0">
-              <a:latin typeface="Arial" panose="020B0604020202020204" pitchFamily="34" charset="0"/>
-              <a:cs typeface="Arial" panose="020B0604020202020204" pitchFamily="34" charset="0"/>
-            </a:endParaRPr>
-          </a:p>
-          <a:p>
-            <a:pPr algn="just"/>
-            <a:endParaRPr lang="en-US" sz="1200" dirty="0">
-              <a:latin typeface="Arial" panose="020B0604020202020204" pitchFamily="34" charset="0"/>
-              <a:cs typeface="Arial" panose="020B0604020202020204" pitchFamily="34" charset="0"/>
-            </a:endParaRPr>
-          </a:p>
-          <a:p>
-            <a:pPr algn="just"/>
-            <a:endParaRPr lang="en-US" sz="1200" dirty="0">
-              <a:latin typeface="Arial" panose="020B0604020202020204" pitchFamily="34" charset="0"/>
-              <a:cs typeface="Arial" panose="020B0604020202020204" pitchFamily="34" charset="0"/>
-            </a:endParaRPr>
-          </a:p>
-          <a:p>
-            <a:pPr algn="just"/>
-            <a:endParaRPr lang="en-US" sz="1200" dirty="0">
-              <a:latin typeface="Arial" panose="020B0604020202020204" pitchFamily="34" charset="0"/>
-              <a:cs typeface="Arial" panose="020B0604020202020204" pitchFamily="34" charset="0"/>
-            </a:endParaRPr>
-          </a:p>
-        </p:txBody>
-      </p:sp>
+      <mc:AlternateContent xmlns:mc="http://schemas.openxmlformats.org/markup-compatibility/2006">
+        <mc:Choice xmlns:a14="http://schemas.microsoft.com/office/drawing/2010/main" Requires="a14">
+          <p:sp>
+            <p:nvSpPr>
+              <p:cNvPr id="2" name="CuadroTexto 1">
+                <a:extLst>
+                  <a:ext uri="{FF2B5EF4-FFF2-40B4-BE49-F238E27FC236}">
+                    <a16:creationId xmlns:a16="http://schemas.microsoft.com/office/drawing/2014/main" id="{D0F8CF3B-B920-DBFC-F825-0C87B51EADA7}"/>
+                  </a:ext>
+                </a:extLst>
+              </p:cNvPr>
+              <p:cNvSpPr txBox="1"/>
+              <p:nvPr/>
+            </p:nvSpPr>
+            <p:spPr>
+              <a:xfrm>
+                <a:off x="532525" y="3581400"/>
+                <a:ext cx="11199971" cy="2492990"/>
+              </a:xfrm>
+              <a:prstGeom prst="rect">
+                <a:avLst/>
+              </a:prstGeom>
+              <a:solidFill>
+                <a:schemeClr val="bg1">
+                  <a:lumMod val="95000"/>
+                </a:schemeClr>
+              </a:solidFill>
+              <a:ln w="28575">
+                <a:solidFill>
+                  <a:srgbClr val="E0700D"/>
+                </a:solidFill>
+              </a:ln>
+            </p:spPr>
+            <p:txBody>
+              <a:bodyPr wrap="square" rtlCol="0">
+                <a:spAutoFit/>
+              </a:bodyPr>
+              <a:lstStyle/>
+              <a:p>
+                <a:pPr algn="just"/>
+                <a:r>
+                  <a:rPr lang="es-CO" sz="1600" dirty="0">
+                    <a:latin typeface="Arial" panose="020B0604020202020204" pitchFamily="34" charset="0"/>
+                    <a:cs typeface="Arial" panose="020B0604020202020204" pitchFamily="34" charset="0"/>
+                  </a:rPr>
+                  <a:t>In a </a:t>
+                </a:r>
+                <a:r>
+                  <a:rPr lang="es-CO" sz="1600" dirty="0" err="1">
+                    <a:latin typeface="Arial" panose="020B0604020202020204" pitchFamily="34" charset="0"/>
+                    <a:cs typeface="Arial" panose="020B0604020202020204" pitchFamily="34" charset="0"/>
+                  </a:rPr>
+                  <a:t>coupled</a:t>
+                </a:r>
+                <a:r>
+                  <a:rPr lang="es-CO" sz="1600" dirty="0">
+                    <a:latin typeface="Arial" panose="020B0604020202020204" pitchFamily="34" charset="0"/>
+                    <a:cs typeface="Arial" panose="020B0604020202020204" pitchFamily="34" charset="0"/>
+                  </a:rPr>
+                  <a:t> </a:t>
+                </a:r>
+                <a:r>
+                  <a:rPr lang="es-CO" sz="1600" dirty="0" err="1">
+                    <a:latin typeface="Arial" panose="020B0604020202020204" pitchFamily="34" charset="0"/>
+                    <a:cs typeface="Arial" panose="020B0604020202020204" pitchFamily="34" charset="0"/>
+                  </a:rPr>
+                  <a:t>system</a:t>
+                </a:r>
+                <a:r>
+                  <a:rPr lang="es-CO" sz="1600" dirty="0">
+                    <a:latin typeface="Arial" panose="020B0604020202020204" pitchFamily="34" charset="0"/>
+                    <a:cs typeface="Arial" panose="020B0604020202020204" pitchFamily="34" charset="0"/>
+                  </a:rPr>
+                  <a:t>, </a:t>
+                </a:r>
+                <a:r>
+                  <a:rPr lang="es-CO" sz="1600" dirty="0" err="1">
+                    <a:latin typeface="Arial" panose="020B0604020202020204" pitchFamily="34" charset="0"/>
+                    <a:cs typeface="Arial" panose="020B0604020202020204" pitchFamily="34" charset="0"/>
+                  </a:rPr>
+                  <a:t>the</a:t>
+                </a:r>
+                <a:r>
+                  <a:rPr lang="es-CO" sz="1600" dirty="0">
+                    <a:latin typeface="Arial" panose="020B0604020202020204" pitchFamily="34" charset="0"/>
+                    <a:cs typeface="Arial" panose="020B0604020202020204" pitchFamily="34" charset="0"/>
+                  </a:rPr>
+                  <a:t> </a:t>
+                </a:r>
+                <a:r>
+                  <a:rPr lang="es-CO" sz="1600" dirty="0" err="1">
+                    <a:latin typeface="Arial" panose="020B0604020202020204" pitchFamily="34" charset="0"/>
+                    <a:cs typeface="Arial" panose="020B0604020202020204" pitchFamily="34" charset="0"/>
+                  </a:rPr>
+                  <a:t>structure</a:t>
+                </a:r>
+                <a:r>
+                  <a:rPr lang="es-CO" sz="1600" dirty="0">
+                    <a:latin typeface="Arial" panose="020B0604020202020204" pitchFamily="34" charset="0"/>
+                    <a:cs typeface="Arial" panose="020B0604020202020204" pitchFamily="34" charset="0"/>
+                  </a:rPr>
+                  <a:t> no </a:t>
+                </a:r>
+                <a:r>
+                  <a:rPr lang="es-CO" sz="1600" dirty="0" err="1">
+                    <a:latin typeface="Arial" panose="020B0604020202020204" pitchFamily="34" charset="0"/>
+                    <a:cs typeface="Arial" panose="020B0604020202020204" pitchFamily="34" charset="0"/>
+                  </a:rPr>
+                  <a:t>longer</a:t>
+                </a:r>
+                <a:r>
+                  <a:rPr lang="es-CO" sz="1600" dirty="0">
+                    <a:latin typeface="Arial" panose="020B0604020202020204" pitchFamily="34" charset="0"/>
+                    <a:cs typeface="Arial" panose="020B0604020202020204" pitchFamily="34" charset="0"/>
+                  </a:rPr>
+                  <a:t> </a:t>
+                </a:r>
+                <a:r>
+                  <a:rPr lang="es-CO" sz="1600" dirty="0" err="1">
+                    <a:latin typeface="Arial" panose="020B0604020202020204" pitchFamily="34" charset="0"/>
+                    <a:cs typeface="Arial" panose="020B0604020202020204" pitchFamily="34" charset="0"/>
+                  </a:rPr>
+                  <a:t>behaves</a:t>
+                </a:r>
+                <a:r>
+                  <a:rPr lang="es-CO" sz="1600" dirty="0">
+                    <a:latin typeface="Arial" panose="020B0604020202020204" pitchFamily="34" charset="0"/>
+                    <a:cs typeface="Arial" panose="020B0604020202020204" pitchFamily="34" charset="0"/>
+                  </a:rPr>
+                  <a:t> as </a:t>
+                </a:r>
+                <a:r>
+                  <a:rPr lang="es-CO" sz="1600" dirty="0" err="1">
+                    <a:latin typeface="Arial" panose="020B0604020202020204" pitchFamily="34" charset="0"/>
+                    <a:cs typeface="Arial" panose="020B0604020202020204" pitchFamily="34" charset="0"/>
+                  </a:rPr>
+                  <a:t>two</a:t>
+                </a:r>
+                <a:r>
+                  <a:rPr lang="es-CO" sz="1600" dirty="0">
+                    <a:latin typeface="Arial" panose="020B0604020202020204" pitchFamily="34" charset="0"/>
+                    <a:cs typeface="Arial" panose="020B0604020202020204" pitchFamily="34" charset="0"/>
+                  </a:rPr>
+                  <a:t> </a:t>
+                </a:r>
+                <a:r>
+                  <a:rPr lang="es-CO" sz="1600" dirty="0" err="1">
+                    <a:latin typeface="Arial" panose="020B0604020202020204" pitchFamily="34" charset="0"/>
+                    <a:cs typeface="Arial" panose="020B0604020202020204" pitchFamily="34" charset="0"/>
+                  </a:rPr>
+                  <a:t>independent</a:t>
+                </a:r>
+                <a:r>
+                  <a:rPr lang="es-CO" sz="1600" dirty="0">
+                    <a:latin typeface="Arial" panose="020B0604020202020204" pitchFamily="34" charset="0"/>
+                    <a:cs typeface="Arial" panose="020B0604020202020204" pitchFamily="34" charset="0"/>
+                  </a:rPr>
+                  <a:t> </a:t>
+                </a:r>
+                <a:r>
+                  <a:rPr lang="es-CO" sz="1600" dirty="0" err="1">
+                    <a:latin typeface="Arial" panose="020B0604020202020204" pitchFamily="34" charset="0"/>
+                    <a:cs typeface="Arial" panose="020B0604020202020204" pitchFamily="34" charset="0"/>
+                  </a:rPr>
+                  <a:t>waveguides</a:t>
+                </a:r>
+                <a:r>
+                  <a:rPr lang="es-CO" sz="1600" dirty="0">
+                    <a:latin typeface="Arial" panose="020B0604020202020204" pitchFamily="34" charset="0"/>
+                    <a:cs typeface="Arial" panose="020B0604020202020204" pitchFamily="34" charset="0"/>
+                  </a:rPr>
+                  <a:t> </a:t>
+                </a:r>
+                <a:r>
+                  <a:rPr lang="es-CO" sz="1600" dirty="0" err="1">
+                    <a:latin typeface="Arial" panose="020B0604020202020204" pitchFamily="34" charset="0"/>
+                    <a:cs typeface="Arial" panose="020B0604020202020204" pitchFamily="34" charset="0"/>
+                  </a:rPr>
+                  <a:t>but</a:t>
+                </a:r>
+                <a:r>
+                  <a:rPr lang="es-CO" sz="1600" dirty="0">
+                    <a:latin typeface="Arial" panose="020B0604020202020204" pitchFamily="34" charset="0"/>
+                    <a:cs typeface="Arial" panose="020B0604020202020204" pitchFamily="34" charset="0"/>
+                  </a:rPr>
+                  <a:t> </a:t>
+                </a:r>
+                <a:r>
+                  <a:rPr lang="es-CO" sz="1600" dirty="0" err="1">
+                    <a:latin typeface="Arial" panose="020B0604020202020204" pitchFamily="34" charset="0"/>
+                    <a:cs typeface="Arial" panose="020B0604020202020204" pitchFamily="34" charset="0"/>
+                  </a:rPr>
+                  <a:t>instead</a:t>
+                </a:r>
+                <a:r>
+                  <a:rPr lang="es-CO" sz="1600" dirty="0">
+                    <a:latin typeface="Arial" panose="020B0604020202020204" pitchFamily="34" charset="0"/>
+                    <a:cs typeface="Arial" panose="020B0604020202020204" pitchFamily="34" charset="0"/>
+                  </a:rPr>
+                  <a:t> </a:t>
+                </a:r>
+                <a:r>
+                  <a:rPr lang="es-CO" sz="1600" dirty="0" err="1">
+                    <a:latin typeface="Arial" panose="020B0604020202020204" pitchFamily="34" charset="0"/>
+                    <a:cs typeface="Arial" panose="020B0604020202020204" pitchFamily="34" charset="0"/>
+                  </a:rPr>
+                  <a:t>supports</a:t>
+                </a:r>
+                <a:r>
+                  <a:rPr lang="es-CO" sz="1600" dirty="0">
+                    <a:latin typeface="Arial" panose="020B0604020202020204" pitchFamily="34" charset="0"/>
+                    <a:cs typeface="Arial" panose="020B0604020202020204" pitchFamily="34" charset="0"/>
+                  </a:rPr>
+                  <a:t> global </a:t>
+                </a:r>
+                <a:r>
+                  <a:rPr lang="es-CO" sz="1600" dirty="0" err="1">
+                    <a:latin typeface="Arial" panose="020B0604020202020204" pitchFamily="34" charset="0"/>
+                    <a:cs typeface="Arial" panose="020B0604020202020204" pitchFamily="34" charset="0"/>
+                  </a:rPr>
+                  <a:t>eigenmodes</a:t>
+                </a:r>
+                <a:r>
+                  <a:rPr lang="es-CO" sz="1600" dirty="0">
+                    <a:latin typeface="Arial" panose="020B0604020202020204" pitchFamily="34" charset="0"/>
+                    <a:cs typeface="Arial" panose="020B0604020202020204" pitchFamily="34" charset="0"/>
+                  </a:rPr>
+                  <a:t> </a:t>
+                </a:r>
+                <a:r>
+                  <a:rPr lang="es-CO" sz="1600" dirty="0" err="1">
+                    <a:latin typeface="Arial" panose="020B0604020202020204" pitchFamily="34" charset="0"/>
+                    <a:cs typeface="Arial" panose="020B0604020202020204" pitchFamily="34" charset="0"/>
+                  </a:rPr>
+                  <a:t>of</a:t>
+                </a:r>
+                <a:r>
+                  <a:rPr lang="es-CO" sz="1600" dirty="0">
+                    <a:latin typeface="Arial" panose="020B0604020202020204" pitchFamily="34" charset="0"/>
+                    <a:cs typeface="Arial" panose="020B0604020202020204" pitchFamily="34" charset="0"/>
+                  </a:rPr>
+                  <a:t> </a:t>
+                </a:r>
+                <a:r>
+                  <a:rPr lang="es-CO" sz="1600" dirty="0" err="1">
+                    <a:latin typeface="Arial" panose="020B0604020202020204" pitchFamily="34" charset="0"/>
+                    <a:cs typeface="Arial" panose="020B0604020202020204" pitchFamily="34" charset="0"/>
+                  </a:rPr>
+                  <a:t>the</a:t>
+                </a:r>
+                <a:r>
+                  <a:rPr lang="es-CO" sz="1600" dirty="0">
+                    <a:latin typeface="Arial" panose="020B0604020202020204" pitchFamily="34" charset="0"/>
+                    <a:cs typeface="Arial" panose="020B0604020202020204" pitchFamily="34" charset="0"/>
+                  </a:rPr>
+                  <a:t> </a:t>
+                </a:r>
+                <a:r>
+                  <a:rPr lang="es-CO" sz="1600" dirty="0" err="1">
+                    <a:latin typeface="Arial" panose="020B0604020202020204" pitchFamily="34" charset="0"/>
+                    <a:cs typeface="Arial" panose="020B0604020202020204" pitchFamily="34" charset="0"/>
+                  </a:rPr>
+                  <a:t>combined</a:t>
+                </a:r>
+                <a:r>
+                  <a:rPr lang="es-CO" sz="1600" dirty="0">
+                    <a:latin typeface="Arial" panose="020B0604020202020204" pitchFamily="34" charset="0"/>
+                    <a:cs typeface="Arial" panose="020B0604020202020204" pitchFamily="34" charset="0"/>
+                  </a:rPr>
+                  <a:t> </a:t>
+                </a:r>
+                <a:r>
+                  <a:rPr lang="es-CO" sz="1600" dirty="0" err="1">
+                    <a:latin typeface="Arial" panose="020B0604020202020204" pitchFamily="34" charset="0"/>
+                    <a:cs typeface="Arial" panose="020B0604020202020204" pitchFamily="34" charset="0"/>
+                  </a:rPr>
+                  <a:t>structure</a:t>
+                </a:r>
+                <a:r>
+                  <a:rPr lang="es-CO" sz="1600" dirty="0">
+                    <a:latin typeface="Arial" panose="020B0604020202020204" pitchFamily="34" charset="0"/>
+                    <a:cs typeface="Arial" panose="020B0604020202020204" pitchFamily="34" charset="0"/>
+                  </a:rPr>
+                  <a:t>. In a </a:t>
+                </a:r>
+                <a:r>
+                  <a:rPr lang="es-CO" sz="1600" dirty="0" err="1">
+                    <a:latin typeface="Arial" panose="020B0604020202020204" pitchFamily="34" charset="0"/>
+                    <a:cs typeface="Arial" panose="020B0604020202020204" pitchFamily="34" charset="0"/>
+                  </a:rPr>
+                  <a:t>directional</a:t>
+                </a:r>
+                <a:r>
+                  <a:rPr lang="es-CO" sz="1600" dirty="0">
+                    <a:latin typeface="Arial" panose="020B0604020202020204" pitchFamily="34" charset="0"/>
+                    <a:cs typeface="Arial" panose="020B0604020202020204" pitchFamily="34" charset="0"/>
+                  </a:rPr>
+                  <a:t> </a:t>
+                </a:r>
+                <a:r>
+                  <a:rPr lang="es-CO" sz="1600" dirty="0" err="1">
+                    <a:latin typeface="Arial" panose="020B0604020202020204" pitchFamily="34" charset="0"/>
+                    <a:cs typeface="Arial" panose="020B0604020202020204" pitchFamily="34" charset="0"/>
+                  </a:rPr>
+                  <a:t>coupler</a:t>
+                </a:r>
+                <a:r>
+                  <a:rPr lang="es-CO" sz="1600" dirty="0">
+                    <a:latin typeface="Arial" panose="020B0604020202020204" pitchFamily="34" charset="0"/>
+                    <a:cs typeface="Arial" panose="020B0604020202020204" pitchFamily="34" charset="0"/>
+                  </a:rPr>
+                  <a:t> (DC), </a:t>
+                </a:r>
+                <a:r>
+                  <a:rPr lang="es-CO" sz="1600" dirty="0" err="1">
+                    <a:latin typeface="Arial" panose="020B0604020202020204" pitchFamily="34" charset="0"/>
+                    <a:cs typeface="Arial" panose="020B0604020202020204" pitchFamily="34" charset="0"/>
+                  </a:rPr>
+                  <a:t>two</a:t>
+                </a:r>
+                <a:r>
+                  <a:rPr lang="es-CO" sz="1600" dirty="0">
+                    <a:latin typeface="Arial" panose="020B0604020202020204" pitchFamily="34" charset="0"/>
+                    <a:cs typeface="Arial" panose="020B0604020202020204" pitchFamily="34" charset="0"/>
+                  </a:rPr>
+                  <a:t> </a:t>
+                </a:r>
+                <a:r>
+                  <a:rPr lang="es-CO" sz="1600" dirty="0" err="1">
+                    <a:latin typeface="Arial" panose="020B0604020202020204" pitchFamily="34" charset="0"/>
+                    <a:cs typeface="Arial" panose="020B0604020202020204" pitchFamily="34" charset="0"/>
+                  </a:rPr>
+                  <a:t>supermodes</a:t>
+                </a:r>
+                <a:r>
+                  <a:rPr lang="es-CO" sz="1600" dirty="0">
+                    <a:latin typeface="Arial" panose="020B0604020202020204" pitchFamily="34" charset="0"/>
+                    <a:cs typeface="Arial" panose="020B0604020202020204" pitchFamily="34" charset="0"/>
+                  </a:rPr>
+                  <a:t> </a:t>
+                </a:r>
+                <a:r>
+                  <a:rPr lang="es-CO" sz="1600" dirty="0" err="1">
+                    <a:latin typeface="Arial" panose="020B0604020202020204" pitchFamily="34" charset="0"/>
+                    <a:cs typeface="Arial" panose="020B0604020202020204" pitchFamily="34" charset="0"/>
+                  </a:rPr>
+                  <a:t>arise</a:t>
+                </a:r>
+                <a:r>
+                  <a:rPr lang="es-CO" sz="1600" dirty="0">
+                    <a:latin typeface="Arial" panose="020B0604020202020204" pitchFamily="34" charset="0"/>
+                    <a:cs typeface="Arial" panose="020B0604020202020204" pitchFamily="34" charset="0"/>
+                  </a:rPr>
+                  <a:t>: a </a:t>
+                </a:r>
+                <a:r>
+                  <a:rPr lang="es-CO" sz="1600" dirty="0" err="1">
+                    <a:latin typeface="Arial" panose="020B0604020202020204" pitchFamily="34" charset="0"/>
+                    <a:cs typeface="Arial" panose="020B0604020202020204" pitchFamily="34" charset="0"/>
+                  </a:rPr>
+                  <a:t>symmetric</a:t>
+                </a:r>
+                <a:r>
+                  <a:rPr lang="es-CO" sz="1600" dirty="0">
+                    <a:latin typeface="Arial" panose="020B0604020202020204" pitchFamily="34" charset="0"/>
+                    <a:cs typeface="Arial" panose="020B0604020202020204" pitchFamily="34" charset="0"/>
+                  </a:rPr>
+                  <a:t> (</a:t>
+                </a:r>
+                <a:r>
+                  <a:rPr lang="es-CO" sz="1600" dirty="0" err="1">
+                    <a:latin typeface="Arial" panose="020B0604020202020204" pitchFamily="34" charset="0"/>
+                    <a:cs typeface="Arial" panose="020B0604020202020204" pitchFamily="34" charset="0"/>
+                  </a:rPr>
+                  <a:t>even</a:t>
+                </a:r>
+                <a:r>
+                  <a:rPr lang="es-CO" sz="1600" dirty="0">
+                    <a:latin typeface="Arial" panose="020B0604020202020204" pitchFamily="34" charset="0"/>
+                    <a:cs typeface="Arial" panose="020B0604020202020204" pitchFamily="34" charset="0"/>
+                  </a:rPr>
+                  <a:t>) </a:t>
+                </a:r>
+                <a:r>
+                  <a:rPr lang="es-CO" sz="1600" dirty="0" err="1">
+                    <a:latin typeface="Arial" panose="020B0604020202020204" pitchFamily="34" charset="0"/>
+                    <a:cs typeface="Arial" panose="020B0604020202020204" pitchFamily="34" charset="0"/>
+                  </a:rPr>
+                  <a:t>supermode</a:t>
+                </a:r>
+                <a:r>
+                  <a:rPr lang="es-CO" sz="1600" dirty="0">
+                    <a:latin typeface="Arial" panose="020B0604020202020204" pitchFamily="34" charset="0"/>
+                    <a:cs typeface="Arial" panose="020B0604020202020204" pitchFamily="34" charset="0"/>
+                  </a:rPr>
+                  <a:t>, </a:t>
+                </a:r>
+                <a:r>
+                  <a:rPr lang="es-CO" sz="1600" dirty="0" err="1">
+                    <a:latin typeface="Arial" panose="020B0604020202020204" pitchFamily="34" charset="0"/>
+                    <a:cs typeface="Arial" panose="020B0604020202020204" pitchFamily="34" charset="0"/>
+                  </a:rPr>
+                  <a:t>characterized</a:t>
+                </a:r>
+                <a:r>
+                  <a:rPr lang="es-CO" sz="1600" dirty="0">
+                    <a:latin typeface="Arial" panose="020B0604020202020204" pitchFamily="34" charset="0"/>
+                    <a:cs typeface="Arial" panose="020B0604020202020204" pitchFamily="34" charset="0"/>
+                  </a:rPr>
+                  <a:t> </a:t>
+                </a:r>
+                <a:r>
+                  <a:rPr lang="es-CO" sz="1600" dirty="0" err="1">
+                    <a:latin typeface="Arial" panose="020B0604020202020204" pitchFamily="34" charset="0"/>
+                    <a:cs typeface="Arial" panose="020B0604020202020204" pitchFamily="34" charset="0"/>
+                  </a:rPr>
+                  <a:t>by</a:t>
+                </a:r>
+                <a:r>
+                  <a:rPr lang="es-CO" sz="1600" dirty="0">
+                    <a:latin typeface="Arial" panose="020B0604020202020204" pitchFamily="34" charset="0"/>
+                    <a:cs typeface="Arial" panose="020B0604020202020204" pitchFamily="34" charset="0"/>
+                  </a:rPr>
+                  <a:t> </a:t>
+                </a:r>
+                <a:r>
+                  <a:rPr lang="es-CO" sz="1600" dirty="0" err="1">
+                    <a:latin typeface="Arial" panose="020B0604020202020204" pitchFamily="34" charset="0"/>
+                    <a:cs typeface="Arial" panose="020B0604020202020204" pitchFamily="34" charset="0"/>
+                  </a:rPr>
+                  <a:t>an</a:t>
+                </a:r>
+                <a:r>
+                  <a:rPr lang="es-CO" sz="1600" dirty="0">
+                    <a:latin typeface="Arial" panose="020B0604020202020204" pitchFamily="34" charset="0"/>
+                    <a:cs typeface="Arial" panose="020B0604020202020204" pitchFamily="34" charset="0"/>
+                  </a:rPr>
+                  <a:t> </a:t>
+                </a:r>
+                <a:r>
+                  <a:rPr lang="es-CO" sz="1600" dirty="0" err="1">
+                    <a:latin typeface="Arial" panose="020B0604020202020204" pitchFamily="34" charset="0"/>
+                    <a:cs typeface="Arial" panose="020B0604020202020204" pitchFamily="34" charset="0"/>
+                  </a:rPr>
+                  <a:t>in-phase</a:t>
+                </a:r>
+                <a:r>
+                  <a:rPr lang="es-CO" sz="1600" dirty="0">
+                    <a:latin typeface="Arial" panose="020B0604020202020204" pitchFamily="34" charset="0"/>
+                    <a:cs typeface="Arial" panose="020B0604020202020204" pitchFamily="34" charset="0"/>
+                  </a:rPr>
+                  <a:t> </a:t>
+                </a:r>
+                <a:r>
+                  <a:rPr lang="es-CO" sz="1600" dirty="0" err="1">
+                    <a:latin typeface="Arial" panose="020B0604020202020204" pitchFamily="34" charset="0"/>
+                    <a:cs typeface="Arial" panose="020B0604020202020204" pitchFamily="34" charset="0"/>
+                  </a:rPr>
+                  <a:t>field</a:t>
+                </a:r>
+                <a:r>
+                  <a:rPr lang="es-CO" sz="1600" dirty="0">
+                    <a:latin typeface="Arial" panose="020B0604020202020204" pitchFamily="34" charset="0"/>
+                    <a:cs typeface="Arial" panose="020B0604020202020204" pitchFamily="34" charset="0"/>
+                  </a:rPr>
+                  <a:t> </a:t>
+                </a:r>
+                <a:r>
+                  <a:rPr lang="es-CO" sz="1600" dirty="0" err="1">
+                    <a:latin typeface="Arial" panose="020B0604020202020204" pitchFamily="34" charset="0"/>
+                    <a:cs typeface="Arial" panose="020B0604020202020204" pitchFamily="34" charset="0"/>
+                  </a:rPr>
+                  <a:t>distribution</a:t>
+                </a:r>
+                <a:r>
+                  <a:rPr lang="es-CO" sz="1600" dirty="0">
+                    <a:latin typeface="Arial" panose="020B0604020202020204" pitchFamily="34" charset="0"/>
+                    <a:cs typeface="Arial" panose="020B0604020202020204" pitchFamily="34" charset="0"/>
+                  </a:rPr>
+                  <a:t> </a:t>
+                </a:r>
+                <a:r>
+                  <a:rPr lang="es-CO" sz="1600" dirty="0" err="1">
+                    <a:latin typeface="Arial" panose="020B0604020202020204" pitchFamily="34" charset="0"/>
+                    <a:cs typeface="Arial" panose="020B0604020202020204" pitchFamily="34" charset="0"/>
+                  </a:rPr>
+                  <a:t>across</a:t>
+                </a:r>
+                <a:r>
+                  <a:rPr lang="es-CO" sz="1600" dirty="0">
+                    <a:latin typeface="Arial" panose="020B0604020202020204" pitchFamily="34" charset="0"/>
+                    <a:cs typeface="Arial" panose="020B0604020202020204" pitchFamily="34" charset="0"/>
+                  </a:rPr>
+                  <a:t> </a:t>
+                </a:r>
+                <a:r>
+                  <a:rPr lang="es-CO" sz="1600" dirty="0" err="1">
+                    <a:latin typeface="Arial" panose="020B0604020202020204" pitchFamily="34" charset="0"/>
+                    <a:cs typeface="Arial" panose="020B0604020202020204" pitchFamily="34" charset="0"/>
+                  </a:rPr>
+                  <a:t>both</a:t>
+                </a:r>
+                <a:r>
+                  <a:rPr lang="es-CO" sz="1600" dirty="0">
+                    <a:latin typeface="Arial" panose="020B0604020202020204" pitchFamily="34" charset="0"/>
+                    <a:cs typeface="Arial" panose="020B0604020202020204" pitchFamily="34" charset="0"/>
+                  </a:rPr>
+                  <a:t> </a:t>
+                </a:r>
+                <a:r>
+                  <a:rPr lang="es-CO" sz="1600" dirty="0" err="1">
+                    <a:latin typeface="Arial" panose="020B0604020202020204" pitchFamily="34" charset="0"/>
+                    <a:cs typeface="Arial" panose="020B0604020202020204" pitchFamily="34" charset="0"/>
+                  </a:rPr>
+                  <a:t>waveguides</a:t>
+                </a:r>
+                <a:r>
+                  <a:rPr lang="es-CO" sz="1600" dirty="0">
+                    <a:latin typeface="Arial" panose="020B0604020202020204" pitchFamily="34" charset="0"/>
+                    <a:cs typeface="Arial" panose="020B0604020202020204" pitchFamily="34" charset="0"/>
+                  </a:rPr>
+                  <a:t>, and </a:t>
+                </a:r>
+                <a:r>
+                  <a:rPr lang="es-CO" sz="1600" dirty="0" err="1">
+                    <a:latin typeface="Arial" panose="020B0604020202020204" pitchFamily="34" charset="0"/>
+                    <a:cs typeface="Arial" panose="020B0604020202020204" pitchFamily="34" charset="0"/>
+                  </a:rPr>
+                  <a:t>an</a:t>
+                </a:r>
+                <a:r>
+                  <a:rPr lang="es-CO" sz="1600" dirty="0">
+                    <a:latin typeface="Arial" panose="020B0604020202020204" pitchFamily="34" charset="0"/>
+                    <a:cs typeface="Arial" panose="020B0604020202020204" pitchFamily="34" charset="0"/>
+                  </a:rPr>
+                  <a:t> </a:t>
+                </a:r>
+                <a:r>
+                  <a:rPr lang="es-CO" sz="1600" dirty="0" err="1">
+                    <a:latin typeface="Arial" panose="020B0604020202020204" pitchFamily="34" charset="0"/>
+                    <a:cs typeface="Arial" panose="020B0604020202020204" pitchFamily="34" charset="0"/>
+                  </a:rPr>
+                  <a:t>antisymmetric</a:t>
+                </a:r>
+                <a:r>
+                  <a:rPr lang="es-CO" sz="1600" dirty="0">
+                    <a:latin typeface="Arial" panose="020B0604020202020204" pitchFamily="34" charset="0"/>
+                    <a:cs typeface="Arial" panose="020B0604020202020204" pitchFamily="34" charset="0"/>
+                  </a:rPr>
+                  <a:t> (</a:t>
+                </a:r>
+                <a:r>
+                  <a:rPr lang="es-CO" sz="1600" dirty="0" err="1">
+                    <a:latin typeface="Arial" panose="020B0604020202020204" pitchFamily="34" charset="0"/>
+                    <a:cs typeface="Arial" panose="020B0604020202020204" pitchFamily="34" charset="0"/>
+                  </a:rPr>
+                  <a:t>odd</a:t>
+                </a:r>
+                <a:r>
+                  <a:rPr lang="es-CO" sz="1600" dirty="0">
+                    <a:latin typeface="Arial" panose="020B0604020202020204" pitchFamily="34" charset="0"/>
+                    <a:cs typeface="Arial" panose="020B0604020202020204" pitchFamily="34" charset="0"/>
+                  </a:rPr>
+                  <a:t>) </a:t>
+                </a:r>
+                <a:r>
+                  <a:rPr lang="es-CO" sz="1600" dirty="0" err="1">
+                    <a:latin typeface="Arial" panose="020B0604020202020204" pitchFamily="34" charset="0"/>
+                    <a:cs typeface="Arial" panose="020B0604020202020204" pitchFamily="34" charset="0"/>
+                  </a:rPr>
+                  <a:t>supermode</a:t>
+                </a:r>
+                <a:r>
+                  <a:rPr lang="es-CO" sz="1600" dirty="0">
+                    <a:latin typeface="Arial" panose="020B0604020202020204" pitchFamily="34" charset="0"/>
+                    <a:cs typeface="Arial" panose="020B0604020202020204" pitchFamily="34" charset="0"/>
+                  </a:rPr>
+                  <a:t>, </a:t>
+                </a:r>
+                <a:r>
+                  <a:rPr lang="es-CO" sz="1600" dirty="0" err="1">
+                    <a:latin typeface="Arial" panose="020B0604020202020204" pitchFamily="34" charset="0"/>
+                    <a:cs typeface="Arial" panose="020B0604020202020204" pitchFamily="34" charset="0"/>
+                  </a:rPr>
+                  <a:t>which</a:t>
+                </a:r>
+                <a:r>
+                  <a:rPr lang="es-CO" sz="1600" dirty="0">
+                    <a:latin typeface="Arial" panose="020B0604020202020204" pitchFamily="34" charset="0"/>
+                    <a:cs typeface="Arial" panose="020B0604020202020204" pitchFamily="34" charset="0"/>
+                  </a:rPr>
+                  <a:t> </a:t>
+                </a:r>
+                <a:r>
+                  <a:rPr lang="es-CO" sz="1600" dirty="0" err="1">
+                    <a:latin typeface="Arial" panose="020B0604020202020204" pitchFamily="34" charset="0"/>
+                    <a:cs typeface="Arial" panose="020B0604020202020204" pitchFamily="34" charset="0"/>
+                  </a:rPr>
+                  <a:t>exhibits</a:t>
+                </a:r>
+                <a:r>
+                  <a:rPr lang="es-CO" sz="1600" dirty="0">
+                    <a:latin typeface="Arial" panose="020B0604020202020204" pitchFamily="34" charset="0"/>
+                    <a:cs typeface="Arial" panose="020B0604020202020204" pitchFamily="34" charset="0"/>
+                  </a:rPr>
+                  <a:t> a </a:t>
+                </a:r>
+                <a:r>
+                  <a:rPr lang="el-GR" sz="1600" dirty="0">
+                    <a:latin typeface="Arial" panose="020B0604020202020204" pitchFamily="34" charset="0"/>
+                    <a:cs typeface="Arial" panose="020B0604020202020204" pitchFamily="34" charset="0"/>
+                  </a:rPr>
+                  <a:t>π </a:t>
+                </a:r>
+                <a:r>
+                  <a:rPr lang="es-CO" sz="1600" dirty="0" err="1">
+                    <a:latin typeface="Arial" panose="020B0604020202020204" pitchFamily="34" charset="0"/>
+                    <a:cs typeface="Arial" panose="020B0604020202020204" pitchFamily="34" charset="0"/>
+                  </a:rPr>
+                  <a:t>phase</a:t>
+                </a:r>
+                <a:r>
+                  <a:rPr lang="es-CO" sz="1600" dirty="0">
+                    <a:latin typeface="Arial" panose="020B0604020202020204" pitchFamily="34" charset="0"/>
+                    <a:cs typeface="Arial" panose="020B0604020202020204" pitchFamily="34" charset="0"/>
+                  </a:rPr>
+                  <a:t> shift </a:t>
+                </a:r>
+                <a:r>
+                  <a:rPr lang="es-CO" sz="1600" dirty="0" err="1">
+                    <a:latin typeface="Arial" panose="020B0604020202020204" pitchFamily="34" charset="0"/>
+                    <a:cs typeface="Arial" panose="020B0604020202020204" pitchFamily="34" charset="0"/>
+                  </a:rPr>
+                  <a:t>between</a:t>
+                </a:r>
+                <a:r>
+                  <a:rPr lang="es-CO" sz="1600" dirty="0">
+                    <a:latin typeface="Arial" panose="020B0604020202020204" pitchFamily="34" charset="0"/>
+                    <a:cs typeface="Arial" panose="020B0604020202020204" pitchFamily="34" charset="0"/>
+                  </a:rPr>
+                  <a:t> </a:t>
+                </a:r>
+                <a:r>
+                  <a:rPr lang="es-CO" sz="1600" dirty="0" err="1">
+                    <a:latin typeface="Arial" panose="020B0604020202020204" pitchFamily="34" charset="0"/>
+                    <a:cs typeface="Arial" panose="020B0604020202020204" pitchFamily="34" charset="0"/>
+                  </a:rPr>
+                  <a:t>the</a:t>
+                </a:r>
+                <a:r>
+                  <a:rPr lang="es-CO" sz="1600" dirty="0">
+                    <a:latin typeface="Arial" panose="020B0604020202020204" pitchFamily="34" charset="0"/>
+                    <a:cs typeface="Arial" panose="020B0604020202020204" pitchFamily="34" charset="0"/>
+                  </a:rPr>
+                  <a:t> </a:t>
+                </a:r>
+                <a:r>
+                  <a:rPr lang="es-CO" sz="1600" dirty="0" err="1">
+                    <a:latin typeface="Arial" panose="020B0604020202020204" pitchFamily="34" charset="0"/>
+                    <a:cs typeface="Arial" panose="020B0604020202020204" pitchFamily="34" charset="0"/>
+                  </a:rPr>
+                  <a:t>two</a:t>
+                </a:r>
+                <a:r>
+                  <a:rPr lang="es-CO" sz="1600" dirty="0">
+                    <a:latin typeface="Arial" panose="020B0604020202020204" pitchFamily="34" charset="0"/>
+                    <a:cs typeface="Arial" panose="020B0604020202020204" pitchFamily="34" charset="0"/>
+                  </a:rPr>
+                  <a:t> </a:t>
+                </a:r>
+                <a:r>
+                  <a:rPr lang="es-CO" sz="1600" dirty="0" err="1">
+                    <a:latin typeface="Arial" panose="020B0604020202020204" pitchFamily="34" charset="0"/>
+                    <a:cs typeface="Arial" panose="020B0604020202020204" pitchFamily="34" charset="0"/>
+                  </a:rPr>
+                  <a:t>waveguides</a:t>
+                </a:r>
+                <a:r>
+                  <a:rPr lang="es-CO" sz="1600" dirty="0">
+                    <a:latin typeface="Arial" panose="020B0604020202020204" pitchFamily="34" charset="0"/>
+                    <a:cs typeface="Arial" panose="020B0604020202020204" pitchFamily="34" charset="0"/>
+                  </a:rPr>
+                  <a:t>. </a:t>
+                </a:r>
+                <a:r>
+                  <a:rPr lang="es-CO" sz="1600" dirty="0" err="1">
+                    <a:latin typeface="Arial" panose="020B0604020202020204" pitchFamily="34" charset="0"/>
+                    <a:cs typeface="Arial" panose="020B0604020202020204" pitchFamily="34" charset="0"/>
+                  </a:rPr>
+                  <a:t>This</a:t>
+                </a:r>
+                <a:r>
+                  <a:rPr lang="es-CO" sz="1600" dirty="0">
+                    <a:latin typeface="Arial" panose="020B0604020202020204" pitchFamily="34" charset="0"/>
+                    <a:cs typeface="Arial" panose="020B0604020202020204" pitchFamily="34" charset="0"/>
+                  </a:rPr>
+                  <a:t> </a:t>
+                </a:r>
+                <a:r>
+                  <a:rPr lang="es-CO" sz="1600" dirty="0" err="1">
+                    <a:latin typeface="Arial" panose="020B0604020202020204" pitchFamily="34" charset="0"/>
+                    <a:cs typeface="Arial" panose="020B0604020202020204" pitchFamily="34" charset="0"/>
+                  </a:rPr>
+                  <a:t>behavior</a:t>
+                </a:r>
+                <a:r>
+                  <a:rPr lang="es-CO" sz="1600" dirty="0">
+                    <a:latin typeface="Arial" panose="020B0604020202020204" pitchFamily="34" charset="0"/>
+                    <a:cs typeface="Arial" panose="020B0604020202020204" pitchFamily="34" charset="0"/>
+                  </a:rPr>
+                  <a:t> can be </a:t>
+                </a:r>
+                <a:r>
+                  <a:rPr lang="es-CO" sz="1600" dirty="0" err="1">
+                    <a:latin typeface="Arial" panose="020B0604020202020204" pitchFamily="34" charset="0"/>
+                    <a:cs typeface="Arial" panose="020B0604020202020204" pitchFamily="34" charset="0"/>
+                  </a:rPr>
+                  <a:t>observed</a:t>
+                </a:r>
+                <a:r>
+                  <a:rPr lang="es-CO" sz="1600" dirty="0">
+                    <a:latin typeface="Arial" panose="020B0604020202020204" pitchFamily="34" charset="0"/>
+                    <a:cs typeface="Arial" panose="020B0604020202020204" pitchFamily="34" charset="0"/>
+                  </a:rPr>
+                  <a:t> in </a:t>
+                </a:r>
+                <a:r>
+                  <a:rPr lang="es-CO" sz="1600" dirty="0" err="1">
+                    <a:latin typeface="Arial" panose="020B0604020202020204" pitchFamily="34" charset="0"/>
+                    <a:cs typeface="Arial" panose="020B0604020202020204" pitchFamily="34" charset="0"/>
+                  </a:rPr>
+                  <a:t>mode</a:t>
+                </a:r>
+                <a:r>
+                  <a:rPr lang="es-CO" sz="1600" dirty="0">
+                    <a:latin typeface="Arial" panose="020B0604020202020204" pitchFamily="34" charset="0"/>
+                    <a:cs typeface="Arial" panose="020B0604020202020204" pitchFamily="34" charset="0"/>
+                  </a:rPr>
+                  <a:t> </a:t>
+                </a:r>
+                <a:r>
+                  <a:rPr lang="es-CO" sz="1600" dirty="0" err="1">
+                    <a:latin typeface="Arial" panose="020B0604020202020204" pitchFamily="34" charset="0"/>
+                    <a:cs typeface="Arial" panose="020B0604020202020204" pitchFamily="34" charset="0"/>
+                  </a:rPr>
+                  <a:t>pairs</a:t>
+                </a:r>
+                <a:r>
+                  <a:rPr lang="es-CO" sz="1600" dirty="0">
+                    <a:latin typeface="Arial" panose="020B0604020202020204" pitchFamily="34" charset="0"/>
+                    <a:cs typeface="Arial" panose="020B0604020202020204" pitchFamily="34" charset="0"/>
+                  </a:rPr>
+                  <a:t> 0–1 and 2–3.</a:t>
+                </a:r>
+              </a:p>
+              <a:p>
+                <a:pPr algn="just"/>
+                <a:endParaRPr lang="es-CO" sz="1600" dirty="0">
+                  <a:latin typeface="Arial" panose="020B0604020202020204" pitchFamily="34" charset="0"/>
+                  <a:cs typeface="Arial" panose="020B0604020202020204" pitchFamily="34" charset="0"/>
+                </a:endParaRPr>
+              </a:p>
+              <a:p>
+                <a:pPr algn="just"/>
+                <a:r>
+                  <a:rPr lang="es-CO" sz="1600" dirty="0" err="1">
+                    <a:latin typeface="Arial" panose="020B0604020202020204" pitchFamily="34" charset="0"/>
+                    <a:cs typeface="Arial" panose="020B0604020202020204" pitchFamily="34" charset="0"/>
+                  </a:rPr>
+                  <a:t>Furthermore</a:t>
+                </a:r>
+                <a:r>
+                  <a:rPr lang="es-CO" sz="1600" dirty="0">
+                    <a:latin typeface="Arial" panose="020B0604020202020204" pitchFamily="34" charset="0"/>
+                    <a:cs typeface="Arial" panose="020B0604020202020204" pitchFamily="34" charset="0"/>
+                  </a:rPr>
+                  <a:t>, </a:t>
+                </a:r>
+                <a:r>
+                  <a:rPr lang="es-CO" sz="1600" dirty="0" err="1">
+                    <a:latin typeface="Arial" panose="020B0604020202020204" pitchFamily="34" charset="0"/>
+                    <a:cs typeface="Arial" panose="020B0604020202020204" pitchFamily="34" charset="0"/>
+                  </a:rPr>
+                  <a:t>the</a:t>
+                </a:r>
+                <a:r>
+                  <a:rPr lang="es-CO" sz="1600" dirty="0">
+                    <a:latin typeface="Arial" panose="020B0604020202020204" pitchFamily="34" charset="0"/>
+                    <a:cs typeface="Arial" panose="020B0604020202020204" pitchFamily="34" charset="0"/>
+                  </a:rPr>
+                  <a:t> TE </a:t>
+                </a:r>
+                <a:r>
+                  <a:rPr lang="es-CO" sz="1600" dirty="0" err="1">
+                    <a:latin typeface="Arial" panose="020B0604020202020204" pitchFamily="34" charset="0"/>
+                    <a:cs typeface="Arial" panose="020B0604020202020204" pitchFamily="34" charset="0"/>
+                  </a:rPr>
+                  <a:t>polarization</a:t>
+                </a:r>
+                <a:r>
+                  <a:rPr lang="es-CO" sz="1600" dirty="0">
+                    <a:latin typeface="Arial" panose="020B0604020202020204" pitchFamily="34" charset="0"/>
+                    <a:cs typeface="Arial" panose="020B0604020202020204" pitchFamily="34" charset="0"/>
+                  </a:rPr>
+                  <a:t> </a:t>
+                </a:r>
+                <a:r>
+                  <a:rPr lang="es-CO" sz="1600" dirty="0" err="1">
+                    <a:latin typeface="Arial" panose="020B0604020202020204" pitchFamily="34" charset="0"/>
+                    <a:cs typeface="Arial" panose="020B0604020202020204" pitchFamily="34" charset="0"/>
+                  </a:rPr>
+                  <a:t>supports</a:t>
+                </a:r>
+                <a:r>
+                  <a:rPr lang="es-CO" sz="1600" dirty="0">
+                    <a:latin typeface="Arial" panose="020B0604020202020204" pitchFamily="34" charset="0"/>
+                    <a:cs typeface="Arial" panose="020B0604020202020204" pitchFamily="34" charset="0"/>
+                  </a:rPr>
+                  <a:t> </a:t>
+                </a:r>
+                <a:r>
+                  <a:rPr lang="es-CO" sz="1600" dirty="0" err="1">
+                    <a:latin typeface="Arial" panose="020B0604020202020204" pitchFamily="34" charset="0"/>
+                    <a:cs typeface="Arial" panose="020B0604020202020204" pitchFamily="34" charset="0"/>
+                  </a:rPr>
+                  <a:t>two</a:t>
+                </a:r>
+                <a:r>
+                  <a:rPr lang="es-CO" sz="1600" dirty="0">
+                    <a:latin typeface="Arial" panose="020B0604020202020204" pitchFamily="34" charset="0"/>
+                    <a:cs typeface="Arial" panose="020B0604020202020204" pitchFamily="34" charset="0"/>
+                  </a:rPr>
+                  <a:t> </a:t>
+                </a:r>
+                <a:r>
+                  <a:rPr lang="es-CO" sz="1600" dirty="0" err="1">
+                    <a:latin typeface="Arial" panose="020B0604020202020204" pitchFamily="34" charset="0"/>
+                    <a:cs typeface="Arial" panose="020B0604020202020204" pitchFamily="34" charset="0"/>
+                  </a:rPr>
+                  <a:t>supermodes</a:t>
+                </a:r>
+                <a:r>
+                  <a:rPr lang="es-CO" sz="1600" dirty="0">
+                    <a:latin typeface="Arial" panose="020B0604020202020204" pitchFamily="34" charset="0"/>
+                    <a:cs typeface="Arial" panose="020B0604020202020204" pitchFamily="34" charset="0"/>
+                  </a:rPr>
+                  <a:t>, </a:t>
+                </a:r>
+                <a:r>
+                  <a:rPr lang="es-CO" sz="1600" dirty="0" err="1">
+                    <a:latin typeface="Arial" panose="020B0604020202020204" pitchFamily="34" charset="0"/>
+                    <a:cs typeface="Arial" panose="020B0604020202020204" pitchFamily="34" charset="0"/>
+                  </a:rPr>
+                  <a:t>while</a:t>
+                </a:r>
+                <a:r>
+                  <a:rPr lang="es-CO" sz="1600" dirty="0">
+                    <a:latin typeface="Arial" panose="020B0604020202020204" pitchFamily="34" charset="0"/>
+                    <a:cs typeface="Arial" panose="020B0604020202020204" pitchFamily="34" charset="0"/>
+                  </a:rPr>
+                  <a:t> </a:t>
+                </a:r>
+                <a:r>
+                  <a:rPr lang="es-CO" sz="1600" dirty="0" err="1">
+                    <a:latin typeface="Arial" panose="020B0604020202020204" pitchFamily="34" charset="0"/>
+                    <a:cs typeface="Arial" panose="020B0604020202020204" pitchFamily="34" charset="0"/>
+                  </a:rPr>
+                  <a:t>the</a:t>
+                </a:r>
+                <a:r>
+                  <a:rPr lang="es-CO" sz="1600" dirty="0">
+                    <a:latin typeface="Arial" panose="020B0604020202020204" pitchFamily="34" charset="0"/>
+                    <a:cs typeface="Arial" panose="020B0604020202020204" pitchFamily="34" charset="0"/>
+                  </a:rPr>
+                  <a:t> TM </a:t>
+                </a:r>
+                <a:r>
+                  <a:rPr lang="es-CO" sz="1600" dirty="0" err="1">
+                    <a:latin typeface="Arial" panose="020B0604020202020204" pitchFamily="34" charset="0"/>
+                    <a:cs typeface="Arial" panose="020B0604020202020204" pitchFamily="34" charset="0"/>
+                  </a:rPr>
+                  <a:t>polarization</a:t>
+                </a:r>
+                <a:r>
+                  <a:rPr lang="es-CO" sz="1600" dirty="0">
+                    <a:latin typeface="Arial" panose="020B0604020202020204" pitchFamily="34" charset="0"/>
+                    <a:cs typeface="Arial" panose="020B0604020202020204" pitchFamily="34" charset="0"/>
+                  </a:rPr>
+                  <a:t> </a:t>
+                </a:r>
+                <a:r>
+                  <a:rPr lang="es-CO" sz="1600" dirty="0" err="1">
+                    <a:latin typeface="Arial" panose="020B0604020202020204" pitchFamily="34" charset="0"/>
+                    <a:cs typeface="Arial" panose="020B0604020202020204" pitchFamily="34" charset="0"/>
+                  </a:rPr>
+                  <a:t>supports</a:t>
+                </a:r>
+                <a:r>
+                  <a:rPr lang="es-CO" sz="1600" dirty="0">
+                    <a:latin typeface="Arial" panose="020B0604020202020204" pitchFamily="34" charset="0"/>
+                    <a:cs typeface="Arial" panose="020B0604020202020204" pitchFamily="34" charset="0"/>
+                  </a:rPr>
+                  <a:t> </a:t>
+                </a:r>
+                <a:r>
+                  <a:rPr lang="es-CO" sz="1600" dirty="0" err="1">
+                    <a:latin typeface="Arial" panose="020B0604020202020204" pitchFamily="34" charset="0"/>
+                    <a:cs typeface="Arial" panose="020B0604020202020204" pitchFamily="34" charset="0"/>
+                  </a:rPr>
+                  <a:t>another</a:t>
+                </a:r>
+                <a:r>
+                  <a:rPr lang="es-CO" sz="1600" dirty="0">
+                    <a:latin typeface="Arial" panose="020B0604020202020204" pitchFamily="34" charset="0"/>
+                    <a:cs typeface="Arial" panose="020B0604020202020204" pitchFamily="34" charset="0"/>
+                  </a:rPr>
+                  <a:t> </a:t>
+                </a:r>
+                <a:r>
+                  <a:rPr lang="es-CO" sz="1600" dirty="0" err="1">
+                    <a:latin typeface="Arial" panose="020B0604020202020204" pitchFamily="34" charset="0"/>
+                    <a:cs typeface="Arial" panose="020B0604020202020204" pitchFamily="34" charset="0"/>
+                  </a:rPr>
+                  <a:t>two</a:t>
+                </a:r>
+                <a:r>
+                  <a:rPr lang="es-CO" sz="1600" dirty="0">
+                    <a:latin typeface="Arial" panose="020B0604020202020204" pitchFamily="34" charset="0"/>
+                    <a:cs typeface="Arial" panose="020B0604020202020204" pitchFamily="34" charset="0"/>
+                  </a:rPr>
+                  <a:t> </a:t>
+                </a:r>
+                <a:r>
+                  <a:rPr lang="es-CO" sz="1600" dirty="0" err="1">
+                    <a:latin typeface="Arial" panose="020B0604020202020204" pitchFamily="34" charset="0"/>
+                    <a:cs typeface="Arial" panose="020B0604020202020204" pitchFamily="34" charset="0"/>
+                  </a:rPr>
+                  <a:t>supermodes</a:t>
+                </a:r>
+                <a:r>
+                  <a:rPr lang="es-CO" sz="1600" dirty="0">
+                    <a:latin typeface="Arial" panose="020B0604020202020204" pitchFamily="34" charset="0"/>
+                    <a:cs typeface="Arial" panose="020B0604020202020204" pitchFamily="34" charset="0"/>
+                  </a:rPr>
+                  <a:t>. </a:t>
+                </a:r>
+                <a:r>
+                  <a:rPr lang="es-CO" sz="1600" dirty="0" err="1">
+                    <a:latin typeface="Arial" panose="020B0604020202020204" pitchFamily="34" charset="0"/>
+                    <a:cs typeface="Arial" panose="020B0604020202020204" pitchFamily="34" charset="0"/>
+                  </a:rPr>
+                  <a:t>From</a:t>
+                </a:r>
+                <a:r>
+                  <a:rPr lang="es-CO" sz="1600" dirty="0">
+                    <a:latin typeface="Arial" panose="020B0604020202020204" pitchFamily="34" charset="0"/>
+                    <a:cs typeface="Arial" panose="020B0604020202020204" pitchFamily="34" charset="0"/>
+                  </a:rPr>
+                  <a:t> </a:t>
+                </a:r>
+                <a:r>
+                  <a:rPr lang="es-CO" sz="1600" dirty="0" err="1">
+                    <a:latin typeface="Arial" panose="020B0604020202020204" pitchFamily="34" charset="0"/>
+                    <a:cs typeface="Arial" panose="020B0604020202020204" pitchFamily="34" charset="0"/>
+                  </a:rPr>
+                  <a:t>each</a:t>
+                </a:r>
+                <a:r>
+                  <a:rPr lang="es-CO" sz="1600" dirty="0">
+                    <a:latin typeface="Arial" panose="020B0604020202020204" pitchFamily="34" charset="0"/>
+                    <a:cs typeface="Arial" panose="020B0604020202020204" pitchFamily="34" charset="0"/>
+                  </a:rPr>
+                  <a:t> </a:t>
+                </a:r>
+                <a:r>
+                  <a:rPr lang="es-CO" sz="1600" dirty="0" err="1">
+                    <a:latin typeface="Arial" panose="020B0604020202020204" pitchFamily="34" charset="0"/>
+                    <a:cs typeface="Arial" panose="020B0604020202020204" pitchFamily="34" charset="0"/>
+                  </a:rPr>
+                  <a:t>corresponding</a:t>
+                </a:r>
+                <a:r>
+                  <a:rPr lang="es-CO" sz="1600" dirty="0">
+                    <a:latin typeface="Arial" panose="020B0604020202020204" pitchFamily="34" charset="0"/>
+                    <a:cs typeface="Arial" panose="020B0604020202020204" pitchFamily="34" charset="0"/>
+                  </a:rPr>
+                  <a:t> </a:t>
+                </a:r>
+                <a:r>
+                  <a:rPr lang="es-CO" sz="1600" dirty="0" err="1">
+                    <a:latin typeface="Arial" panose="020B0604020202020204" pitchFamily="34" charset="0"/>
+                    <a:cs typeface="Arial" panose="020B0604020202020204" pitchFamily="34" charset="0"/>
+                  </a:rPr>
+                  <a:t>pair</a:t>
+                </a:r>
+                <a:r>
+                  <a:rPr lang="es-CO" sz="1600" dirty="0">
+                    <a:latin typeface="Arial" panose="020B0604020202020204" pitchFamily="34" charset="0"/>
+                    <a:cs typeface="Arial" panose="020B0604020202020204" pitchFamily="34" charset="0"/>
+                  </a:rPr>
+                  <a:t> </a:t>
+                </a:r>
+                <a:r>
+                  <a:rPr lang="es-CO" sz="1600" dirty="0" err="1">
+                    <a:latin typeface="Arial" panose="020B0604020202020204" pitchFamily="34" charset="0"/>
+                    <a:cs typeface="Arial" panose="020B0604020202020204" pitchFamily="34" charset="0"/>
+                  </a:rPr>
+                  <a:t>of</a:t>
+                </a:r>
+                <a:r>
+                  <a:rPr lang="es-CO" sz="1600" dirty="0">
+                    <a:latin typeface="Arial" panose="020B0604020202020204" pitchFamily="34" charset="0"/>
+                    <a:cs typeface="Arial" panose="020B0604020202020204" pitchFamily="34" charset="0"/>
+                  </a:rPr>
+                  <a:t> </a:t>
+                </a:r>
+                <a:r>
+                  <a:rPr lang="es-CO" sz="1600" dirty="0" err="1">
+                    <a:latin typeface="Arial" panose="020B0604020202020204" pitchFamily="34" charset="0"/>
+                    <a:cs typeface="Arial" panose="020B0604020202020204" pitchFamily="34" charset="0"/>
+                  </a:rPr>
+                  <a:t>effective</a:t>
+                </a:r>
+                <a:r>
+                  <a:rPr lang="es-CO" sz="1600" dirty="0">
+                    <a:latin typeface="Arial" panose="020B0604020202020204" pitchFamily="34" charset="0"/>
+                    <a:cs typeface="Arial" panose="020B0604020202020204" pitchFamily="34" charset="0"/>
+                  </a:rPr>
+                  <a:t> </a:t>
+                </a:r>
+                <a:r>
+                  <a:rPr lang="es-CO" sz="1600" dirty="0" err="1">
+                    <a:latin typeface="Arial" panose="020B0604020202020204" pitchFamily="34" charset="0"/>
+                    <a:cs typeface="Arial" panose="020B0604020202020204" pitchFamily="34" charset="0"/>
+                  </a:rPr>
+                  <a:t>indices</a:t>
+                </a:r>
+                <a:r>
+                  <a:rPr lang="es-CO" sz="1600" dirty="0">
+                    <a:latin typeface="Arial" panose="020B0604020202020204" pitchFamily="34" charset="0"/>
+                    <a:cs typeface="Arial" panose="020B0604020202020204" pitchFamily="34" charset="0"/>
+                  </a:rPr>
+                  <a:t>, </a:t>
+                </a:r>
+                <a:r>
+                  <a:rPr lang="es-CO" sz="1600" dirty="0" err="1">
+                    <a:latin typeface="Arial" panose="020B0604020202020204" pitchFamily="34" charset="0"/>
+                    <a:cs typeface="Arial" panose="020B0604020202020204" pitchFamily="34" charset="0"/>
+                  </a:rPr>
+                  <a:t>it</a:t>
+                </a:r>
+                <a:r>
+                  <a:rPr lang="es-CO" sz="1600" dirty="0">
+                    <a:latin typeface="Arial" panose="020B0604020202020204" pitchFamily="34" charset="0"/>
+                    <a:cs typeface="Arial" panose="020B0604020202020204" pitchFamily="34" charset="0"/>
+                  </a:rPr>
+                  <a:t> </a:t>
+                </a:r>
+                <a:r>
+                  <a:rPr lang="es-CO" sz="1600" dirty="0" err="1">
+                    <a:latin typeface="Arial" panose="020B0604020202020204" pitchFamily="34" charset="0"/>
+                    <a:cs typeface="Arial" panose="020B0604020202020204" pitchFamily="34" charset="0"/>
+                  </a:rPr>
+                  <a:t>is</a:t>
+                </a:r>
+                <a:r>
+                  <a:rPr lang="es-CO" sz="1600" dirty="0">
+                    <a:latin typeface="Arial" panose="020B0604020202020204" pitchFamily="34" charset="0"/>
+                    <a:cs typeface="Arial" panose="020B0604020202020204" pitchFamily="34" charset="0"/>
+                  </a:rPr>
+                  <a:t> </a:t>
+                </a:r>
+                <a:r>
+                  <a:rPr lang="es-CO" sz="1600" dirty="0" err="1">
+                    <a:latin typeface="Arial" panose="020B0604020202020204" pitchFamily="34" charset="0"/>
+                    <a:cs typeface="Arial" panose="020B0604020202020204" pitchFamily="34" charset="0"/>
+                  </a:rPr>
+                  <a:t>possible</a:t>
+                </a:r>
+                <a:r>
+                  <a:rPr lang="es-CO" sz="1600" dirty="0">
+                    <a:latin typeface="Arial" panose="020B0604020202020204" pitchFamily="34" charset="0"/>
+                    <a:cs typeface="Arial" panose="020B0604020202020204" pitchFamily="34" charset="0"/>
+                  </a:rPr>
+                  <a:t> </a:t>
+                </a:r>
+                <a:r>
+                  <a:rPr lang="es-CO" sz="1600" dirty="0" err="1">
+                    <a:latin typeface="Arial" panose="020B0604020202020204" pitchFamily="34" charset="0"/>
+                    <a:cs typeface="Arial" panose="020B0604020202020204" pitchFamily="34" charset="0"/>
+                  </a:rPr>
+                  <a:t>to</a:t>
+                </a:r>
+                <a:r>
+                  <a:rPr lang="es-CO" sz="1600" dirty="0">
+                    <a:latin typeface="Arial" panose="020B0604020202020204" pitchFamily="34" charset="0"/>
+                    <a:cs typeface="Arial" panose="020B0604020202020204" pitchFamily="34" charset="0"/>
+                  </a:rPr>
+                  <a:t> determine a beat </a:t>
+                </a:r>
+                <a:r>
+                  <a:rPr lang="es-CO" sz="1600" dirty="0" err="1">
+                    <a:latin typeface="Arial" panose="020B0604020202020204" pitchFamily="34" charset="0"/>
+                    <a:cs typeface="Arial" panose="020B0604020202020204" pitchFamily="34" charset="0"/>
+                  </a:rPr>
+                  <a:t>length</a:t>
+                </a:r>
+                <a:r>
+                  <a:rPr lang="es-CO" sz="1600" dirty="0">
+                    <a:latin typeface="Arial" panose="020B0604020202020204" pitchFamily="34" charset="0"/>
+                    <a:cs typeface="Arial" panose="020B0604020202020204" pitchFamily="34" charset="0"/>
+                  </a:rPr>
+                  <a:t> </a:t>
+                </a:r>
+                <a14:m>
+                  <m:oMath xmlns:m="http://schemas.openxmlformats.org/officeDocument/2006/math">
+                    <m:sSub>
+                      <m:sSubPr>
+                        <m:ctrlPr>
+                          <a:rPr lang="ar-AE" sz="1600"/>
+                        </m:ctrlPr>
+                      </m:sSubPr>
+                      <m:e>
+                        <m:r>
+                          <a:rPr lang="ar-AE" sz="1600"/>
+                          <m:t>𝐿</m:t>
+                        </m:r>
+                      </m:e>
+                      <m:sub>
+                        <m:r>
+                          <a:rPr lang="ar-AE" sz="1600"/>
+                          <m:t>𝜋</m:t>
+                        </m:r>
+                      </m:sub>
+                    </m:sSub>
+                  </m:oMath>
+                </a14:m>
+                <a:r>
+                  <a:rPr lang="es-CO" sz="1600" dirty="0" err="1">
+                    <a:latin typeface="Arial" panose="020B0604020202020204" pitchFamily="34" charset="0"/>
+                    <a:cs typeface="Arial" panose="020B0604020202020204" pitchFamily="34" charset="0"/>
+                  </a:rPr>
+                  <a:t>for</a:t>
+                </a:r>
+                <a:r>
+                  <a:rPr lang="es-CO" sz="1600" dirty="0">
+                    <a:latin typeface="Arial" panose="020B0604020202020204" pitchFamily="34" charset="0"/>
+                    <a:cs typeface="Arial" panose="020B0604020202020204" pitchFamily="34" charset="0"/>
+                  </a:rPr>
+                  <a:t> </a:t>
+                </a:r>
+                <a:r>
+                  <a:rPr lang="es-CO" sz="1600" dirty="0" err="1">
+                    <a:latin typeface="Arial" panose="020B0604020202020204" pitchFamily="34" charset="0"/>
+                    <a:cs typeface="Arial" panose="020B0604020202020204" pitchFamily="34" charset="0"/>
+                  </a:rPr>
+                  <a:t>the</a:t>
+                </a:r>
+                <a:r>
+                  <a:rPr lang="es-CO" sz="1600" dirty="0">
+                    <a:latin typeface="Arial" panose="020B0604020202020204" pitchFamily="34" charset="0"/>
+                    <a:cs typeface="Arial" panose="020B0604020202020204" pitchFamily="34" charset="0"/>
+                  </a:rPr>
+                  <a:t> TE </a:t>
+                </a:r>
+                <a:r>
+                  <a:rPr lang="es-CO" sz="1600" dirty="0" err="1">
+                    <a:latin typeface="Arial" panose="020B0604020202020204" pitchFamily="34" charset="0"/>
+                    <a:cs typeface="Arial" panose="020B0604020202020204" pitchFamily="34" charset="0"/>
+                  </a:rPr>
+                  <a:t>supermodes</a:t>
+                </a:r>
+                <a:r>
+                  <a:rPr lang="es-CO" sz="1600" dirty="0">
+                    <a:latin typeface="Arial" panose="020B0604020202020204" pitchFamily="34" charset="0"/>
+                    <a:cs typeface="Arial" panose="020B0604020202020204" pitchFamily="34" charset="0"/>
+                  </a:rPr>
+                  <a:t> and </a:t>
+                </a:r>
+                <a:r>
+                  <a:rPr lang="es-CO" sz="1600" dirty="0" err="1">
+                    <a:latin typeface="Arial" panose="020B0604020202020204" pitchFamily="34" charset="0"/>
+                    <a:cs typeface="Arial" panose="020B0604020202020204" pitchFamily="34" charset="0"/>
+                  </a:rPr>
+                  <a:t>another</a:t>
+                </a:r>
+                <a:r>
+                  <a:rPr lang="es-CO" sz="1600" dirty="0">
+                    <a:latin typeface="Arial" panose="020B0604020202020204" pitchFamily="34" charset="0"/>
+                    <a:cs typeface="Arial" panose="020B0604020202020204" pitchFamily="34" charset="0"/>
+                  </a:rPr>
+                  <a:t> </a:t>
+                </a:r>
+                <a14:m>
+                  <m:oMath xmlns:m="http://schemas.openxmlformats.org/officeDocument/2006/math">
+                    <m:sSub>
+                      <m:sSubPr>
+                        <m:ctrlPr>
+                          <a:rPr lang="ar-AE" sz="1600"/>
+                        </m:ctrlPr>
+                      </m:sSubPr>
+                      <m:e>
+                        <m:r>
+                          <a:rPr lang="ar-AE" sz="1600"/>
+                          <m:t>𝐿</m:t>
+                        </m:r>
+                      </m:e>
+                      <m:sub>
+                        <m:r>
+                          <a:rPr lang="ar-AE" sz="1600"/>
+                          <m:t>𝜋</m:t>
+                        </m:r>
+                      </m:sub>
+                    </m:sSub>
+                  </m:oMath>
+                </a14:m>
+                <a:r>
+                  <a:rPr lang="es-CO" sz="1600" dirty="0" err="1">
+                    <a:latin typeface="Arial" panose="020B0604020202020204" pitchFamily="34" charset="0"/>
+                    <a:cs typeface="Arial" panose="020B0604020202020204" pitchFamily="34" charset="0"/>
+                  </a:rPr>
+                  <a:t>for</a:t>
+                </a:r>
+                <a:r>
+                  <a:rPr lang="es-CO" sz="1600" dirty="0">
+                    <a:latin typeface="Arial" panose="020B0604020202020204" pitchFamily="34" charset="0"/>
+                    <a:cs typeface="Arial" panose="020B0604020202020204" pitchFamily="34" charset="0"/>
+                  </a:rPr>
+                  <a:t> </a:t>
+                </a:r>
+                <a:r>
+                  <a:rPr lang="es-CO" sz="1600" dirty="0" err="1">
+                    <a:latin typeface="Arial" panose="020B0604020202020204" pitchFamily="34" charset="0"/>
+                    <a:cs typeface="Arial" panose="020B0604020202020204" pitchFamily="34" charset="0"/>
+                  </a:rPr>
+                  <a:t>the</a:t>
+                </a:r>
+                <a:r>
+                  <a:rPr lang="es-CO" sz="1600" dirty="0">
+                    <a:latin typeface="Arial" panose="020B0604020202020204" pitchFamily="34" charset="0"/>
+                    <a:cs typeface="Arial" panose="020B0604020202020204" pitchFamily="34" charset="0"/>
+                  </a:rPr>
+                  <a:t> TM </a:t>
+                </a:r>
+                <a:r>
+                  <a:rPr lang="es-CO" sz="1600" dirty="0" err="1">
+                    <a:latin typeface="Arial" panose="020B0604020202020204" pitchFamily="34" charset="0"/>
+                    <a:cs typeface="Arial" panose="020B0604020202020204" pitchFamily="34" charset="0"/>
+                  </a:rPr>
+                  <a:t>supermodes</a:t>
+                </a:r>
+                <a:r>
+                  <a:rPr lang="es-CO" sz="1600" dirty="0">
+                    <a:latin typeface="Arial" panose="020B0604020202020204" pitchFamily="34" charset="0"/>
+                    <a:cs typeface="Arial" panose="020B0604020202020204" pitchFamily="34" charset="0"/>
+                  </a:rPr>
+                  <a:t>.</a:t>
+                </a:r>
+                <a:endParaRPr lang="en-US" sz="1200" dirty="0">
+                  <a:latin typeface="Arial" panose="020B0604020202020204" pitchFamily="34" charset="0"/>
+                  <a:cs typeface="Arial" panose="020B0604020202020204" pitchFamily="34" charset="0"/>
+                </a:endParaRPr>
+              </a:p>
+              <a:p>
+                <a:pPr algn="just"/>
+                <a:endParaRPr lang="en-US" sz="1200" dirty="0">
+                  <a:latin typeface="Arial" panose="020B0604020202020204" pitchFamily="34" charset="0"/>
+                  <a:cs typeface="Arial" panose="020B0604020202020204" pitchFamily="34" charset="0"/>
+                </a:endParaRPr>
+              </a:p>
+            </p:txBody>
+          </p:sp>
+        </mc:Choice>
+        <mc:Fallback>
+          <p:sp>
+            <p:nvSpPr>
+              <p:cNvPr id="2" name="CuadroTexto 1">
+                <a:extLst>
+                  <a:ext uri="{FF2B5EF4-FFF2-40B4-BE49-F238E27FC236}">
+                    <a16:creationId xmlns:a16="http://schemas.microsoft.com/office/drawing/2014/main" id="{D0F8CF3B-B920-DBFC-F825-0C87B51EADA7}"/>
+                  </a:ext>
+                </a:extLst>
+              </p:cNvPr>
+              <p:cNvSpPr txBox="1">
+                <a:spLocks noRot="1" noChangeAspect="1" noMove="1" noResize="1" noEditPoints="1" noAdjustHandles="1" noChangeArrowheads="1" noChangeShapeType="1" noTextEdit="1"/>
+              </p:cNvSpPr>
+              <p:nvPr/>
+            </p:nvSpPr>
+            <p:spPr>
+              <a:xfrm>
+                <a:off x="532525" y="3581400"/>
+                <a:ext cx="11199971" cy="2492990"/>
+              </a:xfrm>
+              <a:prstGeom prst="rect">
+                <a:avLst/>
+              </a:prstGeom>
+              <a:blipFill>
+                <a:blip r:embed="rId6"/>
+                <a:stretch>
+                  <a:fillRect l="-163" t="-242" r="-109"/>
+                </a:stretch>
+              </a:blipFill>
+              <a:ln w="28575">
+                <a:solidFill>
+                  <a:srgbClr val="E0700D"/>
+                </a:solidFill>
+              </a:ln>
+            </p:spPr>
+            <p:txBody>
+              <a:bodyPr/>
+              <a:lstStyle/>
+              <a:p>
+                <a:r>
+                  <a:rPr lang="es-CO">
+                    <a:noFill/>
+                  </a:rPr>
+                  <a:t> </a:t>
+                </a:r>
+              </a:p>
+            </p:txBody>
+          </p:sp>
+        </mc:Fallback>
+      </mc:AlternateContent>
     </p:spTree>
     <p:extLst>
       <p:ext uri="{BB962C8B-B14F-4D97-AF65-F5344CB8AC3E}">
@@ -5266,6 +7070,844 @@
 </file>
 
 <file path=ppt/slides/slide4.xml><?xml version="1.0" encoding="utf-8"?>
+<p:sld xmlns:a="http://schemas.openxmlformats.org/drawingml/2006/main" xmlns:r="http://schemas.openxmlformats.org/officeDocument/2006/relationships" xmlns:p="http://schemas.openxmlformats.org/presentationml/2006/main">
+  <p:cSld>
+    <p:spTree>
+      <p:nvGrpSpPr>
+        <p:cNvPr id="1" name="">
+          <a:extLst>
+            <a:ext uri="{FF2B5EF4-FFF2-40B4-BE49-F238E27FC236}">
+              <a16:creationId xmlns:a16="http://schemas.microsoft.com/office/drawing/2014/main" id="{8BD4F58A-FF11-AA47-949D-1BEB61CCBFD8}"/>
+            </a:ext>
+          </a:extLst>
+        </p:cNvPr>
+        <p:cNvGrpSpPr/>
+        <p:nvPr/>
+      </p:nvGrpSpPr>
+      <p:grpSpPr>
+        <a:xfrm>
+          <a:off x="0" y="0"/>
+          <a:ext cx="0" cy="0"/>
+          <a:chOff x="0" y="0"/>
+          <a:chExt cx="0" cy="0"/>
+        </a:xfrm>
+      </p:grpSpPr>
+      <p:sp>
+        <p:nvSpPr>
+          <p:cNvPr id="16" name="object 16">
+            <a:extLst>
+              <a:ext uri="{FF2B5EF4-FFF2-40B4-BE49-F238E27FC236}">
+                <a16:creationId xmlns:a16="http://schemas.microsoft.com/office/drawing/2014/main" id="{B6E8C167-6221-07F8-814E-0520AB52D5DA}"/>
+              </a:ext>
+            </a:extLst>
+          </p:cNvPr>
+          <p:cNvSpPr txBox="1">
+            <a:spLocks noGrp="1"/>
+          </p:cNvSpPr>
+          <p:nvPr>
+            <p:ph type="title"/>
+          </p:nvPr>
+        </p:nvSpPr>
+        <p:spPr>
+          <a:xfrm>
+            <a:off x="685800" y="408883"/>
+            <a:ext cx="10994410" cy="782265"/>
+          </a:xfrm>
+          <a:prstGeom prst="rect">
+            <a:avLst/>
+          </a:prstGeom>
+        </p:spPr>
+        <p:txBody>
+          <a:bodyPr vert="horz" wrap="square" lIns="0" tIns="12700" rIns="0" bIns="0" rtlCol="0">
+            <a:spAutoFit/>
+          </a:bodyPr>
+          <a:lstStyle/>
+          <a:p>
+            <a:pPr marL="12700">
+              <a:lnSpc>
+                <a:spcPct val="100000"/>
+              </a:lnSpc>
+              <a:spcBef>
+                <a:spcPts val="100"/>
+              </a:spcBef>
+            </a:pPr>
+            <a:r>
+              <a:rPr lang="en-US" sz="2500" dirty="0"/>
+              <a:t>Learning outcome #1 – Directional coupler cross-section in </a:t>
+            </a:r>
+            <a:r>
+              <a:rPr lang="en-US" sz="2500" dirty="0" err="1"/>
+              <a:t>GDSFactory</a:t>
+            </a:r>
+            <a:br>
+              <a:rPr lang="es-ES" sz="2500" spc="-5" dirty="0">
+                <a:latin typeface="+mj-lt"/>
+                <a:cs typeface="Lucida Sans"/>
+              </a:rPr>
+            </a:br>
+            <a:endParaRPr sz="2500" b="0" dirty="0">
+              <a:latin typeface="+mj-lt"/>
+              <a:cs typeface="Lucida Sans"/>
+            </a:endParaRPr>
+          </a:p>
+        </p:txBody>
+      </p:sp>
+      <p:pic>
+        <p:nvPicPr>
+          <p:cNvPr id="83" name="Gráfico 82">
+            <a:extLst>
+              <a:ext uri="{FF2B5EF4-FFF2-40B4-BE49-F238E27FC236}">
+                <a16:creationId xmlns:a16="http://schemas.microsoft.com/office/drawing/2014/main" id="{4036DB22-713E-B72C-BFDF-A710C7E54EC1}"/>
+              </a:ext>
+            </a:extLst>
+          </p:cNvPr>
+          <p:cNvPicPr>
+            <a:picLocks noChangeAspect="1"/>
+          </p:cNvPicPr>
+          <p:nvPr/>
+        </p:nvPicPr>
+        <p:blipFill>
+          <a:blip r:embed="rId3">
+            <a:extLst>
+              <a:ext uri="{96DAC541-7B7A-43D3-8B79-37D633B846F1}">
+                <asvg:svgBlip xmlns:asvg="http://schemas.microsoft.com/office/drawing/2016/SVG/main" r:embed="rId4"/>
+              </a:ext>
+            </a:extLst>
+          </a:blip>
+          <a:stretch>
+            <a:fillRect/>
+          </a:stretch>
+        </p:blipFill>
+        <p:spPr>
+          <a:xfrm>
+            <a:off x="5045006" y="6356057"/>
+            <a:ext cx="6409575" cy="363174"/>
+          </a:xfrm>
+          <a:prstGeom prst="rect">
+            <a:avLst/>
+          </a:prstGeom>
+        </p:spPr>
+      </p:pic>
+      <p:sp>
+        <p:nvSpPr>
+          <p:cNvPr id="84" name="Marcador de número de diapositiva 83">
+            <a:extLst>
+              <a:ext uri="{FF2B5EF4-FFF2-40B4-BE49-F238E27FC236}">
+                <a16:creationId xmlns:a16="http://schemas.microsoft.com/office/drawing/2014/main" id="{A040E791-4DD0-3AAF-1645-27AE57F33606}"/>
+              </a:ext>
+            </a:extLst>
+          </p:cNvPr>
+          <p:cNvSpPr>
+            <a:spLocks noGrp="1"/>
+          </p:cNvSpPr>
+          <p:nvPr>
+            <p:ph type="sldNum" sz="quarter" idx="7"/>
+          </p:nvPr>
+        </p:nvSpPr>
+        <p:spPr/>
+        <p:txBody>
+          <a:bodyPr/>
+          <a:lstStyle/>
+          <a:p>
+            <a:fld id="{B6F15528-21DE-4FAA-801E-634DDDAF4B2B}" type="slidenum">
+              <a:rPr lang="es-ES" smtClean="0"/>
+              <a:t>4</a:t>
+            </a:fld>
+            <a:endParaRPr lang="es-ES"/>
+          </a:p>
+        </p:txBody>
+      </p:sp>
+      <p:sp>
+        <p:nvSpPr>
+          <p:cNvPr id="3" name="Marcador de pie de página 2">
+            <a:extLst>
+              <a:ext uri="{FF2B5EF4-FFF2-40B4-BE49-F238E27FC236}">
+                <a16:creationId xmlns:a16="http://schemas.microsoft.com/office/drawing/2014/main" id="{C671B851-542A-B1E9-6C70-51D29E38DA55}"/>
+              </a:ext>
+            </a:extLst>
+          </p:cNvPr>
+          <p:cNvSpPr>
+            <a:spLocks noGrp="1"/>
+          </p:cNvSpPr>
+          <p:nvPr>
+            <p:ph type="ftr" sz="quarter" idx="5"/>
+          </p:nvPr>
+        </p:nvSpPr>
+        <p:spPr/>
+        <p:txBody>
+          <a:bodyPr/>
+          <a:lstStyle/>
+          <a:p>
+            <a:pPr marL="12700">
+              <a:spcBef>
+                <a:spcPts val="15"/>
+              </a:spcBef>
+            </a:pPr>
+            <a:r>
+              <a:rPr lang="es-ES" spc="-5"/>
+              <a:t>LAB 0.2. COUPLERS</a:t>
+            </a:r>
+            <a:endParaRPr lang="es-ES" spc="-5" dirty="0"/>
+          </a:p>
+        </p:txBody>
+      </p:sp>
+      <p:sp>
+        <p:nvSpPr>
+          <p:cNvPr id="25" name="TextBox 24">
+            <a:extLst>
+              <a:ext uri="{FF2B5EF4-FFF2-40B4-BE49-F238E27FC236}">
+                <a16:creationId xmlns:a16="http://schemas.microsoft.com/office/drawing/2014/main" id="{328862E4-31A4-B4F2-55D0-50DF957BE680}"/>
+              </a:ext>
+            </a:extLst>
+          </p:cNvPr>
+          <p:cNvSpPr txBox="1"/>
+          <p:nvPr/>
+        </p:nvSpPr>
+        <p:spPr>
+          <a:xfrm>
+            <a:off x="694065" y="1136126"/>
+            <a:ext cx="5105400" cy="369332"/>
+          </a:xfrm>
+          <a:prstGeom prst="rect">
+            <a:avLst/>
+          </a:prstGeom>
+          <a:noFill/>
+        </p:spPr>
+        <p:txBody>
+          <a:bodyPr wrap="square">
+            <a:spAutoFit/>
+          </a:bodyPr>
+          <a:lstStyle/>
+          <a:p>
+            <a:pPr marL="0" indent="0">
+              <a:buNone/>
+            </a:pPr>
+            <a:r>
+              <a:rPr lang="en-US" sz="1800" b="1" dirty="0"/>
+              <a:t>Mode 0: TE Fraction: 99,49 %, TM Fraction 0,51 %</a:t>
+            </a:r>
+          </a:p>
+        </p:txBody>
+      </p:sp>
+      <p:sp>
+        <p:nvSpPr>
+          <p:cNvPr id="26" name="TextBox 25">
+            <a:extLst>
+              <a:ext uri="{FF2B5EF4-FFF2-40B4-BE49-F238E27FC236}">
+                <a16:creationId xmlns:a16="http://schemas.microsoft.com/office/drawing/2014/main" id="{1C449536-0113-E0A1-38F6-4F83C0C3EE6F}"/>
+              </a:ext>
+            </a:extLst>
+          </p:cNvPr>
+          <p:cNvSpPr txBox="1"/>
+          <p:nvPr/>
+        </p:nvSpPr>
+        <p:spPr>
+          <a:xfrm>
+            <a:off x="6600210" y="1136126"/>
+            <a:ext cx="4905990" cy="369332"/>
+          </a:xfrm>
+          <a:prstGeom prst="rect">
+            <a:avLst/>
+          </a:prstGeom>
+          <a:noFill/>
+        </p:spPr>
+        <p:txBody>
+          <a:bodyPr wrap="square">
+            <a:spAutoFit/>
+          </a:bodyPr>
+          <a:lstStyle/>
+          <a:p>
+            <a:pPr marL="0" indent="0">
+              <a:buNone/>
+            </a:pPr>
+            <a:r>
+              <a:rPr lang="en-US" sz="1800" b="1" dirty="0"/>
+              <a:t>Mode 1: TE Fraction: 99,53 %, TM Fraction 0,47 %</a:t>
+            </a:r>
+          </a:p>
+        </p:txBody>
+      </p:sp>
+      <p:pic>
+        <p:nvPicPr>
+          <p:cNvPr id="27" name="Picture 26">
+            <a:extLst>
+              <a:ext uri="{FF2B5EF4-FFF2-40B4-BE49-F238E27FC236}">
+                <a16:creationId xmlns:a16="http://schemas.microsoft.com/office/drawing/2014/main" id="{BC4EED85-0039-0E8B-D417-C0496B8D19A6}"/>
+              </a:ext>
+            </a:extLst>
+          </p:cNvPr>
+          <p:cNvPicPr>
+            <a:picLocks noChangeAspect="1"/>
+          </p:cNvPicPr>
+          <p:nvPr/>
+        </p:nvPicPr>
+        <p:blipFill>
+          <a:blip r:embed="rId5">
+            <a:extLst>
+              <a:ext uri="{28A0092B-C50C-407E-A947-70E740481C1C}">
+                <a14:useLocalDpi xmlns:a14="http://schemas.microsoft.com/office/drawing/2010/main" val="0"/>
+              </a:ext>
+            </a:extLst>
+          </a:blip>
+          <a:stretch>
+            <a:fillRect/>
+          </a:stretch>
+        </p:blipFill>
+        <p:spPr>
+          <a:xfrm>
+            <a:off x="954232" y="1889125"/>
+            <a:ext cx="4686300" cy="3959116"/>
+          </a:xfrm>
+          <a:prstGeom prst="rect">
+            <a:avLst/>
+          </a:prstGeom>
+        </p:spPr>
+      </p:pic>
+      <p:pic>
+        <p:nvPicPr>
+          <p:cNvPr id="28" name="Picture 27">
+            <a:extLst>
+              <a:ext uri="{FF2B5EF4-FFF2-40B4-BE49-F238E27FC236}">
+                <a16:creationId xmlns:a16="http://schemas.microsoft.com/office/drawing/2014/main" id="{C87CAA45-A8B1-C9BB-971B-5BAF204D2385}"/>
+              </a:ext>
+            </a:extLst>
+          </p:cNvPr>
+          <p:cNvPicPr>
+            <a:picLocks noChangeAspect="1"/>
+          </p:cNvPicPr>
+          <p:nvPr/>
+        </p:nvPicPr>
+        <p:blipFill>
+          <a:blip r:embed="rId6">
+            <a:extLst>
+              <a:ext uri="{28A0092B-C50C-407E-A947-70E740481C1C}">
+                <a14:useLocalDpi xmlns:a14="http://schemas.microsoft.com/office/drawing/2010/main" val="0"/>
+              </a:ext>
+            </a:extLst>
+          </a:blip>
+          <a:stretch>
+            <a:fillRect/>
+          </a:stretch>
+        </p:blipFill>
+        <p:spPr>
+          <a:xfrm>
+            <a:off x="6679402" y="1889125"/>
+            <a:ext cx="4775179" cy="3959116"/>
+          </a:xfrm>
+          <a:prstGeom prst="rect">
+            <a:avLst/>
+          </a:prstGeom>
+        </p:spPr>
+      </p:pic>
+      <p:sp>
+        <p:nvSpPr>
+          <p:cNvPr id="29" name="TextBox 28">
+            <a:extLst>
+              <a:ext uri="{FF2B5EF4-FFF2-40B4-BE49-F238E27FC236}">
+                <a16:creationId xmlns:a16="http://schemas.microsoft.com/office/drawing/2014/main" id="{78C2F905-4797-69D2-EC68-F0D3E423B133}"/>
+              </a:ext>
+            </a:extLst>
+          </p:cNvPr>
+          <p:cNvSpPr txBox="1"/>
+          <p:nvPr/>
+        </p:nvSpPr>
+        <p:spPr>
+          <a:xfrm>
+            <a:off x="1447800" y="4991100"/>
+            <a:ext cx="2555506" cy="369332"/>
+          </a:xfrm>
+          <a:prstGeom prst="rect">
+            <a:avLst/>
+          </a:prstGeom>
+          <a:noFill/>
+        </p:spPr>
+        <p:txBody>
+          <a:bodyPr wrap="square">
+            <a:spAutoFit/>
+          </a:bodyPr>
+          <a:lstStyle/>
+          <a:p>
+            <a:pPr marL="0" indent="0">
+              <a:buNone/>
+            </a:pPr>
+            <a:r>
+              <a:rPr lang="en-US" sz="1800" b="1" dirty="0"/>
+              <a:t>Even (Symmetric) mode</a:t>
+            </a:r>
+          </a:p>
+        </p:txBody>
+      </p:sp>
+      <p:sp>
+        <p:nvSpPr>
+          <p:cNvPr id="30" name="TextBox 29">
+            <a:extLst>
+              <a:ext uri="{FF2B5EF4-FFF2-40B4-BE49-F238E27FC236}">
+                <a16:creationId xmlns:a16="http://schemas.microsoft.com/office/drawing/2014/main" id="{310C5CEB-9E1D-CD66-373E-F4CE2341EF53}"/>
+              </a:ext>
+            </a:extLst>
+          </p:cNvPr>
+          <p:cNvSpPr txBox="1"/>
+          <p:nvPr/>
+        </p:nvSpPr>
+        <p:spPr>
+          <a:xfrm>
+            <a:off x="6679402" y="4991100"/>
+            <a:ext cx="2962704" cy="369332"/>
+          </a:xfrm>
+          <a:prstGeom prst="rect">
+            <a:avLst/>
+          </a:prstGeom>
+          <a:noFill/>
+        </p:spPr>
+        <p:txBody>
+          <a:bodyPr wrap="square">
+            <a:spAutoFit/>
+          </a:bodyPr>
+          <a:lstStyle/>
+          <a:p>
+            <a:pPr marL="0" indent="0">
+              <a:buNone/>
+            </a:pPr>
+            <a:r>
+              <a:rPr lang="en-US" sz="1800" b="1" dirty="0"/>
+              <a:t>Odd (Antisymmetric) mode</a:t>
+            </a:r>
+          </a:p>
+        </p:txBody>
+      </p:sp>
+    </p:spTree>
+    <p:extLst>
+      <p:ext uri="{BB962C8B-B14F-4D97-AF65-F5344CB8AC3E}">
+        <p14:creationId xmlns:p14="http://schemas.microsoft.com/office/powerpoint/2010/main" val="274022445"/>
+      </p:ext>
+    </p:extLst>
+  </p:cSld>
+  <p:clrMapOvr>
+    <a:masterClrMapping/>
+  </p:clrMapOvr>
+</p:sld>
+</file>
+
+<file path=ppt/slides/slide5.xml><?xml version="1.0" encoding="utf-8"?>
+<p:sld xmlns:a="http://schemas.openxmlformats.org/drawingml/2006/main" xmlns:r="http://schemas.openxmlformats.org/officeDocument/2006/relationships" xmlns:p="http://schemas.openxmlformats.org/presentationml/2006/main">
+  <p:cSld>
+    <p:spTree>
+      <p:nvGrpSpPr>
+        <p:cNvPr id="1" name="">
+          <a:extLst>
+            <a:ext uri="{FF2B5EF4-FFF2-40B4-BE49-F238E27FC236}">
+              <a16:creationId xmlns:a16="http://schemas.microsoft.com/office/drawing/2014/main" id="{472AFA11-28A2-CF68-37B3-118528F4CBAF}"/>
+            </a:ext>
+          </a:extLst>
+        </p:cNvPr>
+        <p:cNvGrpSpPr/>
+        <p:nvPr/>
+      </p:nvGrpSpPr>
+      <p:grpSpPr>
+        <a:xfrm>
+          <a:off x="0" y="0"/>
+          <a:ext cx="0" cy="0"/>
+          <a:chOff x="0" y="0"/>
+          <a:chExt cx="0" cy="0"/>
+        </a:xfrm>
+      </p:grpSpPr>
+      <p:sp>
+        <p:nvSpPr>
+          <p:cNvPr id="16" name="object 16">
+            <a:extLst>
+              <a:ext uri="{FF2B5EF4-FFF2-40B4-BE49-F238E27FC236}">
+                <a16:creationId xmlns:a16="http://schemas.microsoft.com/office/drawing/2014/main" id="{867379C1-AC0D-4519-962B-87AE59E0F67F}"/>
+              </a:ext>
+            </a:extLst>
+          </p:cNvPr>
+          <p:cNvSpPr txBox="1">
+            <a:spLocks noGrp="1"/>
+          </p:cNvSpPr>
+          <p:nvPr>
+            <p:ph type="title"/>
+          </p:nvPr>
+        </p:nvSpPr>
+        <p:spPr>
+          <a:xfrm>
+            <a:off x="685800" y="408883"/>
+            <a:ext cx="10994410" cy="782265"/>
+          </a:xfrm>
+          <a:prstGeom prst="rect">
+            <a:avLst/>
+          </a:prstGeom>
+        </p:spPr>
+        <p:txBody>
+          <a:bodyPr vert="horz" wrap="square" lIns="0" tIns="12700" rIns="0" bIns="0" rtlCol="0">
+            <a:spAutoFit/>
+          </a:bodyPr>
+          <a:lstStyle/>
+          <a:p>
+            <a:pPr marL="12700">
+              <a:lnSpc>
+                <a:spcPct val="100000"/>
+              </a:lnSpc>
+              <a:spcBef>
+                <a:spcPts val="100"/>
+              </a:spcBef>
+            </a:pPr>
+            <a:r>
+              <a:rPr lang="en-US" sz="2500" dirty="0"/>
+              <a:t>Learning outcome #1 – Directional coupler cross-section in </a:t>
+            </a:r>
+            <a:r>
+              <a:rPr lang="en-US" sz="2500" dirty="0" err="1"/>
+              <a:t>GDSFactory</a:t>
+            </a:r>
+            <a:br>
+              <a:rPr lang="es-ES" sz="2500" spc="-5" dirty="0">
+                <a:latin typeface="+mj-lt"/>
+                <a:cs typeface="Lucida Sans"/>
+              </a:rPr>
+            </a:br>
+            <a:endParaRPr sz="2500" b="0" dirty="0">
+              <a:latin typeface="+mj-lt"/>
+              <a:cs typeface="Lucida Sans"/>
+            </a:endParaRPr>
+          </a:p>
+        </p:txBody>
+      </p:sp>
+      <p:pic>
+        <p:nvPicPr>
+          <p:cNvPr id="83" name="Gráfico 82">
+            <a:extLst>
+              <a:ext uri="{FF2B5EF4-FFF2-40B4-BE49-F238E27FC236}">
+                <a16:creationId xmlns:a16="http://schemas.microsoft.com/office/drawing/2014/main" id="{49676F91-8CE0-D6B0-7F16-E9D87B6ADA3C}"/>
+              </a:ext>
+            </a:extLst>
+          </p:cNvPr>
+          <p:cNvPicPr>
+            <a:picLocks noChangeAspect="1"/>
+          </p:cNvPicPr>
+          <p:nvPr/>
+        </p:nvPicPr>
+        <p:blipFill>
+          <a:blip r:embed="rId3">
+            <a:extLst>
+              <a:ext uri="{96DAC541-7B7A-43D3-8B79-37D633B846F1}">
+                <asvg:svgBlip xmlns:asvg="http://schemas.microsoft.com/office/drawing/2016/SVG/main" r:embed="rId4"/>
+              </a:ext>
+            </a:extLst>
+          </a:blip>
+          <a:stretch>
+            <a:fillRect/>
+          </a:stretch>
+        </p:blipFill>
+        <p:spPr>
+          <a:xfrm>
+            <a:off x="5045006" y="6356057"/>
+            <a:ext cx="6409575" cy="363174"/>
+          </a:xfrm>
+          <a:prstGeom prst="rect">
+            <a:avLst/>
+          </a:prstGeom>
+        </p:spPr>
+      </p:pic>
+      <p:sp>
+        <p:nvSpPr>
+          <p:cNvPr id="84" name="Marcador de número de diapositiva 83">
+            <a:extLst>
+              <a:ext uri="{FF2B5EF4-FFF2-40B4-BE49-F238E27FC236}">
+                <a16:creationId xmlns:a16="http://schemas.microsoft.com/office/drawing/2014/main" id="{4784DDE9-7BD2-E775-49AB-BE373EC90BE3}"/>
+              </a:ext>
+            </a:extLst>
+          </p:cNvPr>
+          <p:cNvSpPr>
+            <a:spLocks noGrp="1"/>
+          </p:cNvSpPr>
+          <p:nvPr>
+            <p:ph type="sldNum" sz="quarter" idx="7"/>
+          </p:nvPr>
+        </p:nvSpPr>
+        <p:spPr/>
+        <p:txBody>
+          <a:bodyPr/>
+          <a:lstStyle/>
+          <a:p>
+            <a:fld id="{B6F15528-21DE-4FAA-801E-634DDDAF4B2B}" type="slidenum">
+              <a:rPr lang="es-ES" smtClean="0"/>
+              <a:t>5</a:t>
+            </a:fld>
+            <a:endParaRPr lang="es-ES"/>
+          </a:p>
+        </p:txBody>
+      </p:sp>
+      <p:sp>
+        <p:nvSpPr>
+          <p:cNvPr id="3" name="Marcador de pie de página 2">
+            <a:extLst>
+              <a:ext uri="{FF2B5EF4-FFF2-40B4-BE49-F238E27FC236}">
+                <a16:creationId xmlns:a16="http://schemas.microsoft.com/office/drawing/2014/main" id="{4CA04638-683C-0E84-6653-FA3B9268F887}"/>
+              </a:ext>
+            </a:extLst>
+          </p:cNvPr>
+          <p:cNvSpPr>
+            <a:spLocks noGrp="1"/>
+          </p:cNvSpPr>
+          <p:nvPr>
+            <p:ph type="ftr" sz="quarter" idx="5"/>
+          </p:nvPr>
+        </p:nvSpPr>
+        <p:spPr/>
+        <p:txBody>
+          <a:bodyPr/>
+          <a:lstStyle/>
+          <a:p>
+            <a:pPr marL="12700">
+              <a:spcBef>
+                <a:spcPts val="15"/>
+              </a:spcBef>
+            </a:pPr>
+            <a:r>
+              <a:rPr lang="es-ES" spc="-5"/>
+              <a:t>LAB 0.2. COUPLERS</a:t>
+            </a:r>
+            <a:endParaRPr lang="es-ES" spc="-5" dirty="0"/>
+          </a:p>
+        </p:txBody>
+      </p:sp>
+      <p:sp>
+        <p:nvSpPr>
+          <p:cNvPr id="25" name="TextBox 24">
+            <a:extLst>
+              <a:ext uri="{FF2B5EF4-FFF2-40B4-BE49-F238E27FC236}">
+                <a16:creationId xmlns:a16="http://schemas.microsoft.com/office/drawing/2014/main" id="{304CD9F6-2427-1B0E-DB0D-33F471D9A6EF}"/>
+              </a:ext>
+            </a:extLst>
+          </p:cNvPr>
+          <p:cNvSpPr txBox="1"/>
+          <p:nvPr/>
+        </p:nvSpPr>
+        <p:spPr>
+          <a:xfrm>
+            <a:off x="800100" y="1139241"/>
+            <a:ext cx="5105400" cy="369332"/>
+          </a:xfrm>
+          <a:prstGeom prst="rect">
+            <a:avLst/>
+          </a:prstGeom>
+          <a:noFill/>
+        </p:spPr>
+        <p:txBody>
+          <a:bodyPr wrap="square">
+            <a:spAutoFit/>
+          </a:bodyPr>
+          <a:lstStyle/>
+          <a:p>
+            <a:pPr marL="0" indent="0">
+              <a:buNone/>
+            </a:pPr>
+            <a:r>
+              <a:rPr lang="en-US" sz="1800" b="1" dirty="0"/>
+              <a:t>Mode 2: TE Fraction: 0,89 %, TM Fraction 99,11 %</a:t>
+            </a:r>
+          </a:p>
+        </p:txBody>
+      </p:sp>
+      <p:sp>
+        <p:nvSpPr>
+          <p:cNvPr id="26" name="TextBox 25">
+            <a:extLst>
+              <a:ext uri="{FF2B5EF4-FFF2-40B4-BE49-F238E27FC236}">
+                <a16:creationId xmlns:a16="http://schemas.microsoft.com/office/drawing/2014/main" id="{DE2DF547-ADA3-83A6-03A8-815FF1C32BA0}"/>
+              </a:ext>
+            </a:extLst>
+          </p:cNvPr>
+          <p:cNvSpPr txBox="1"/>
+          <p:nvPr/>
+        </p:nvSpPr>
+        <p:spPr>
+          <a:xfrm>
+            <a:off x="6858645" y="1139241"/>
+            <a:ext cx="4905990" cy="369332"/>
+          </a:xfrm>
+          <a:prstGeom prst="rect">
+            <a:avLst/>
+          </a:prstGeom>
+          <a:noFill/>
+        </p:spPr>
+        <p:txBody>
+          <a:bodyPr wrap="square">
+            <a:spAutoFit/>
+          </a:bodyPr>
+          <a:lstStyle/>
+          <a:p>
+            <a:pPr marL="0" indent="0">
+              <a:buNone/>
+            </a:pPr>
+            <a:r>
+              <a:rPr lang="en-US" sz="1800" b="1" dirty="0"/>
+              <a:t>Mode 3: TE Fraction: 1,13 %, TM Fraction 98,87 %</a:t>
+            </a:r>
+          </a:p>
+        </p:txBody>
+      </p:sp>
+      <p:pic>
+        <p:nvPicPr>
+          <p:cNvPr id="5" name="Picture 4">
+            <a:extLst>
+              <a:ext uri="{FF2B5EF4-FFF2-40B4-BE49-F238E27FC236}">
+                <a16:creationId xmlns:a16="http://schemas.microsoft.com/office/drawing/2014/main" id="{1E298896-4CFE-20F9-715F-92B633EBF016}"/>
+              </a:ext>
+            </a:extLst>
+          </p:cNvPr>
+          <p:cNvPicPr>
+            <a:picLocks noChangeAspect="1"/>
+          </p:cNvPicPr>
+          <p:nvPr/>
+        </p:nvPicPr>
+        <p:blipFill>
+          <a:blip r:embed="rId5">
+            <a:extLst>
+              <a:ext uri="{28A0092B-C50C-407E-A947-70E740481C1C}">
+                <a14:useLocalDpi xmlns:a14="http://schemas.microsoft.com/office/drawing/2010/main" val="0"/>
+              </a:ext>
+            </a:extLst>
+          </a:blip>
+          <a:stretch>
+            <a:fillRect/>
+          </a:stretch>
+        </p:blipFill>
+        <p:spPr>
+          <a:xfrm>
+            <a:off x="830001" y="1755000"/>
+            <a:ext cx="4792409" cy="3960000"/>
+          </a:xfrm>
+          <a:prstGeom prst="rect">
+            <a:avLst/>
+          </a:prstGeom>
+        </p:spPr>
+      </p:pic>
+      <p:pic>
+        <p:nvPicPr>
+          <p:cNvPr id="6" name="Picture 5">
+            <a:extLst>
+              <a:ext uri="{FF2B5EF4-FFF2-40B4-BE49-F238E27FC236}">
+                <a16:creationId xmlns:a16="http://schemas.microsoft.com/office/drawing/2014/main" id="{3D566154-D917-D75A-B7CD-04412594924F}"/>
+              </a:ext>
+            </a:extLst>
+          </p:cNvPr>
+          <p:cNvPicPr>
+            <a:picLocks noChangeAspect="1"/>
+          </p:cNvPicPr>
+          <p:nvPr/>
+        </p:nvPicPr>
+        <p:blipFill>
+          <a:blip r:embed="rId6">
+            <a:extLst>
+              <a:ext uri="{28A0092B-C50C-407E-A947-70E740481C1C}">
+                <a14:useLocalDpi xmlns:a14="http://schemas.microsoft.com/office/drawing/2010/main" val="0"/>
+              </a:ext>
+            </a:extLst>
+          </a:blip>
+          <a:stretch>
+            <a:fillRect/>
+          </a:stretch>
+        </p:blipFill>
+        <p:spPr>
+          <a:xfrm>
+            <a:off x="6853822" y="1755000"/>
+            <a:ext cx="4786013" cy="3960000"/>
+          </a:xfrm>
+          <a:prstGeom prst="rect">
+            <a:avLst/>
+          </a:prstGeom>
+        </p:spPr>
+      </p:pic>
+      <p:sp>
+        <p:nvSpPr>
+          <p:cNvPr id="7" name="TextBox 6">
+            <a:extLst>
+              <a:ext uri="{FF2B5EF4-FFF2-40B4-BE49-F238E27FC236}">
+                <a16:creationId xmlns:a16="http://schemas.microsoft.com/office/drawing/2014/main" id="{80E0A06F-45B3-3CCA-3D82-A054BAE39E08}"/>
+              </a:ext>
+            </a:extLst>
+          </p:cNvPr>
+          <p:cNvSpPr txBox="1"/>
+          <p:nvPr/>
+        </p:nvSpPr>
+        <p:spPr>
+          <a:xfrm>
+            <a:off x="1447800" y="4991100"/>
+            <a:ext cx="2555506" cy="369332"/>
+          </a:xfrm>
+          <a:prstGeom prst="rect">
+            <a:avLst/>
+          </a:prstGeom>
+          <a:noFill/>
+        </p:spPr>
+        <p:txBody>
+          <a:bodyPr wrap="square">
+            <a:spAutoFit/>
+          </a:bodyPr>
+          <a:lstStyle/>
+          <a:p>
+            <a:pPr marL="0" indent="0">
+              <a:buNone/>
+            </a:pPr>
+            <a:r>
+              <a:rPr lang="en-US" sz="1800" b="1" dirty="0"/>
+              <a:t>Even (Symmetric) mode</a:t>
+            </a:r>
+          </a:p>
+        </p:txBody>
+      </p:sp>
+      <p:sp>
+        <p:nvSpPr>
+          <p:cNvPr id="8" name="TextBox 7">
+            <a:extLst>
+              <a:ext uri="{FF2B5EF4-FFF2-40B4-BE49-F238E27FC236}">
+                <a16:creationId xmlns:a16="http://schemas.microsoft.com/office/drawing/2014/main" id="{9B6CD7A9-A3EE-0C34-0462-01BE155CACFB}"/>
+              </a:ext>
+            </a:extLst>
+          </p:cNvPr>
+          <p:cNvSpPr txBox="1"/>
+          <p:nvPr/>
+        </p:nvSpPr>
+        <p:spPr>
+          <a:xfrm>
+            <a:off x="6679402" y="4991100"/>
+            <a:ext cx="2962704" cy="369332"/>
+          </a:xfrm>
+          <a:prstGeom prst="rect">
+            <a:avLst/>
+          </a:prstGeom>
+          <a:noFill/>
+        </p:spPr>
+        <p:txBody>
+          <a:bodyPr wrap="square">
+            <a:spAutoFit/>
+          </a:bodyPr>
+          <a:lstStyle/>
+          <a:p>
+            <a:pPr marL="0" indent="0">
+              <a:buNone/>
+            </a:pPr>
+            <a:r>
+              <a:rPr lang="en-US" sz="1800" b="1" dirty="0"/>
+              <a:t>Odd (Antisymmetric) mode</a:t>
+            </a:r>
+          </a:p>
+        </p:txBody>
+      </p:sp>
+    </p:spTree>
+    <p:extLst>
+      <p:ext uri="{BB962C8B-B14F-4D97-AF65-F5344CB8AC3E}">
+        <p14:creationId xmlns:p14="http://schemas.microsoft.com/office/powerpoint/2010/main" val="2545470724"/>
+      </p:ext>
+    </p:extLst>
+  </p:cSld>
+  <p:clrMapOvr>
+    <a:masterClrMapping/>
+  </p:clrMapOvr>
+</p:sld>
+</file>
+
+<file path=ppt/slides/slide6.xml><?xml version="1.0" encoding="utf-8"?>
 <p:sld xmlns:a="http://schemas.openxmlformats.org/drawingml/2006/main" xmlns:r="http://schemas.openxmlformats.org/officeDocument/2006/relationships" xmlns:p="http://schemas.openxmlformats.org/presentationml/2006/main">
   <p:cSld>
     <p:spTree>
@@ -5397,7 +8039,7 @@
           <a:p>
             <a:fld id="{B6F15528-21DE-4FAA-801E-634DDDAF4B2B}" type="slidenum">
               <a:rPr lang="es-ES" smtClean="0"/>
-              <a:t>4</a:t>
+              <a:t>6</a:t>
             </a:fld>
             <a:endParaRPr lang="es-ES"/>
           </a:p>
@@ -5731,8 +8373,8 @@
         </p:nvSpPr>
         <p:spPr>
           <a:xfrm>
-            <a:off x="609441" y="4860334"/>
-            <a:ext cx="11199971" cy="1200329"/>
+            <a:off x="615728" y="3657600"/>
+            <a:ext cx="11199971" cy="2554545"/>
           </a:xfrm>
           <a:prstGeom prst="rect">
             <a:avLst/>
@@ -5756,69 +8398,50 @@
           <a:p>
             <a:pPr algn="just"/>
             <a:r>
-              <a:rPr lang="en-US" sz="1200" dirty="0">
-                <a:latin typeface="Arial" panose="020B0604020202020204" pitchFamily="34" charset="0"/>
-                <a:cs typeface="Arial" panose="020B0604020202020204" pitchFamily="34" charset="0"/>
-              </a:rPr>
-              <a:t>Document all your results (neff, plot fields </a:t>
-            </a:r>
-            <a:r>
-              <a:rPr lang="en-US" sz="1200">
-                <a:latin typeface="Arial" panose="020B0604020202020204" pitchFamily="34" charset="0"/>
-                <a:cs typeface="Arial" panose="020B0604020202020204" pitchFamily="34" charset="0"/>
-              </a:rPr>
-              <a:t>of different modes, </a:t>
-            </a:r>
-            <a:r>
-              <a:rPr lang="en-US" sz="1200" dirty="0">
-                <a:latin typeface="Arial" panose="020B0604020202020204" pitchFamily="34" charset="0"/>
-                <a:cs typeface="Arial" panose="020B0604020202020204" pitchFamily="34" charset="0"/>
-              </a:rPr>
-              <a:t>comparison between </a:t>
-            </a:r>
-            <a:r>
-              <a:rPr lang="en-US" sz="1200">
-                <a:latin typeface="Arial" panose="020B0604020202020204" pitchFamily="34" charset="0"/>
-                <a:cs typeface="Arial" panose="020B0604020202020204" pitchFamily="34" charset="0"/>
-              </a:rPr>
-              <a:t>different polarizations…)</a:t>
-            </a:r>
-            <a:endParaRPr lang="en-US" sz="1200" dirty="0">
-              <a:latin typeface="Arial" panose="020B0604020202020204" pitchFamily="34" charset="0"/>
-              <a:cs typeface="Arial" panose="020B0604020202020204" pitchFamily="34" charset="0"/>
-            </a:endParaRPr>
+              <a:rPr lang="en-US" sz="1600" dirty="0"/>
+              <a:t>During the simulation process, it is important to consider that as the waveguide becomes wider, a larger number of modes are able to propagate. A practical way to determine how many modes are actually guided is to verify whether their effective index is higher than the refractive index of the cladding. If this condition is satisfied, the mode is confined; otherwise, it corresponds to a radiation or leaky mode.</a:t>
+            </a:r>
+            <a:endParaRPr lang="es-CO" sz="1600" dirty="0"/>
           </a:p>
           <a:p>
             <a:pPr algn="just"/>
-            <a:endParaRPr lang="en-US" sz="1200" dirty="0">
-              <a:latin typeface="Arial" panose="020B0604020202020204" pitchFamily="34" charset="0"/>
-              <a:cs typeface="Arial" panose="020B0604020202020204" pitchFamily="34" charset="0"/>
-            </a:endParaRPr>
+            <a:r>
+              <a:rPr lang="en-US" sz="1600" dirty="0"/>
+              <a:t>In the case of an MMI, the calculation of L</a:t>
+            </a:r>
+            <a:r>
+              <a:rPr lang="es-CO" sz="1600" dirty="0"/>
+              <a:t>π</a:t>
+            </a:r>
+            <a:r>
+              <a:rPr lang="en-US" sz="1600" dirty="0"/>
+              <a:t> no longer describes the transfer of optical power between two adjacent waveguides, as happens in a directional coupler. Instead, L</a:t>
+            </a:r>
+            <a:r>
+              <a:rPr lang="es-CO" sz="1600" dirty="0"/>
+              <a:t>π</a:t>
+            </a:r>
+            <a:r>
+              <a:rPr lang="en-US" sz="1600" dirty="0"/>
+              <a:t> represents the periodicity of the interference that occurs between the modes propagating inside the multimode section.</a:t>
+            </a:r>
+            <a:endParaRPr lang="es-CO" sz="1600" dirty="0"/>
           </a:p>
           <a:p>
             <a:pPr algn="just"/>
-            <a:endParaRPr lang="en-US" sz="1200" dirty="0">
-              <a:latin typeface="Arial" panose="020B0604020202020204" pitchFamily="34" charset="0"/>
-              <a:cs typeface="Arial" panose="020B0604020202020204" pitchFamily="34" charset="0"/>
-            </a:endParaRPr>
-          </a:p>
-          <a:p>
-            <a:pPr algn="just"/>
-            <a:endParaRPr lang="en-US" sz="1200" dirty="0">
-              <a:latin typeface="Arial" panose="020B0604020202020204" pitchFamily="34" charset="0"/>
-              <a:cs typeface="Arial" panose="020B0604020202020204" pitchFamily="34" charset="0"/>
-            </a:endParaRPr>
-          </a:p>
-          <a:p>
-            <a:pPr algn="just"/>
-            <a:endParaRPr lang="en-US" sz="1200" dirty="0">
-              <a:latin typeface="Arial" panose="020B0604020202020204" pitchFamily="34" charset="0"/>
-              <a:cs typeface="Arial" panose="020B0604020202020204" pitchFamily="34" charset="0"/>
-            </a:endParaRPr>
-          </a:p>
-          <a:p>
-            <a:pPr algn="just"/>
-            <a:endParaRPr lang="en-US" sz="1200" dirty="0">
+            <a:r>
+              <a:rPr lang="en-US" sz="1600" dirty="0"/>
+              <a:t>It is possible to take the difference between the effective indices of the first two guided modes to find L</a:t>
+            </a:r>
+            <a:r>
+              <a:rPr lang="es-CO" sz="1600" dirty="0"/>
+              <a:t>π</a:t>
+            </a:r>
+            <a:r>
+              <a:rPr lang="en-US" sz="1600" dirty="0"/>
+              <a:t>. However, it is important to respect the polarization of the modes, meaning that the calculation must be performed using either TE modes or TM modes separately, since modes belonging to different polarization families do not interfere with each other.</a:t>
+            </a:r>
+            <a:endParaRPr lang="en-US" sz="1600" dirty="0">
               <a:latin typeface="Arial" panose="020B0604020202020204" pitchFamily="34" charset="0"/>
               <a:cs typeface="Arial" panose="020B0604020202020204" pitchFamily="34" charset="0"/>
             </a:endParaRPr>
@@ -5838,7 +8461,681 @@
 </p:sld>
 </file>
 
-<file path=ppt/slides/slide5.xml><?xml version="1.0" encoding="utf-8"?>
+<file path=ppt/slides/slide7.xml><?xml version="1.0" encoding="utf-8"?>
+<p:sld xmlns:a="http://schemas.openxmlformats.org/drawingml/2006/main" xmlns:r="http://schemas.openxmlformats.org/officeDocument/2006/relationships" xmlns:p="http://schemas.openxmlformats.org/presentationml/2006/main">
+  <p:cSld>
+    <p:spTree>
+      <p:nvGrpSpPr>
+        <p:cNvPr id="1" name="">
+          <a:extLst>
+            <a:ext uri="{FF2B5EF4-FFF2-40B4-BE49-F238E27FC236}">
+              <a16:creationId xmlns:a16="http://schemas.microsoft.com/office/drawing/2014/main" id="{34752B2D-192D-7A13-67EE-C1AEC5BCA4EB}"/>
+            </a:ext>
+          </a:extLst>
+        </p:cNvPr>
+        <p:cNvGrpSpPr/>
+        <p:nvPr/>
+      </p:nvGrpSpPr>
+      <p:grpSpPr>
+        <a:xfrm>
+          <a:off x="0" y="0"/>
+          <a:ext cx="0" cy="0"/>
+          <a:chOff x="0" y="0"/>
+          <a:chExt cx="0" cy="0"/>
+        </a:xfrm>
+      </p:grpSpPr>
+      <p:sp>
+        <p:nvSpPr>
+          <p:cNvPr id="16" name="object 16">
+            <a:extLst>
+              <a:ext uri="{FF2B5EF4-FFF2-40B4-BE49-F238E27FC236}">
+                <a16:creationId xmlns:a16="http://schemas.microsoft.com/office/drawing/2014/main" id="{BA7A4464-82C0-1700-5CA7-314AE94D4F57}"/>
+              </a:ext>
+            </a:extLst>
+          </p:cNvPr>
+          <p:cNvSpPr txBox="1">
+            <a:spLocks noGrp="1"/>
+          </p:cNvSpPr>
+          <p:nvPr>
+            <p:ph type="title"/>
+          </p:nvPr>
+        </p:nvSpPr>
+        <p:spPr>
+          <a:xfrm>
+            <a:off x="685800" y="408883"/>
+            <a:ext cx="10994410" cy="397545"/>
+          </a:xfrm>
+          <a:prstGeom prst="rect">
+            <a:avLst/>
+          </a:prstGeom>
+        </p:spPr>
+        <p:txBody>
+          <a:bodyPr vert="horz" wrap="square" lIns="0" tIns="12700" rIns="0" bIns="0" rtlCol="0">
+            <a:spAutoFit/>
+          </a:bodyPr>
+          <a:lstStyle/>
+          <a:p>
+            <a:pPr marL="12700">
+              <a:lnSpc>
+                <a:spcPct val="100000"/>
+              </a:lnSpc>
+              <a:spcBef>
+                <a:spcPts val="100"/>
+              </a:spcBef>
+            </a:pPr>
+            <a:r>
+              <a:rPr lang="en-US" sz="2500" dirty="0"/>
+              <a:t>Learning outcome #2 – Multimode Interference (MMI) Coupler cross-section</a:t>
+            </a:r>
+            <a:endParaRPr lang="en-US" sz="2500" b="0" dirty="0">
+              <a:latin typeface="+mj-lt"/>
+              <a:cs typeface="Lucida Sans"/>
+            </a:endParaRPr>
+          </a:p>
+        </p:txBody>
+      </p:sp>
+      <p:pic>
+        <p:nvPicPr>
+          <p:cNvPr id="83" name="Gráfico 82">
+            <a:extLst>
+              <a:ext uri="{FF2B5EF4-FFF2-40B4-BE49-F238E27FC236}">
+                <a16:creationId xmlns:a16="http://schemas.microsoft.com/office/drawing/2014/main" id="{A365D421-C51D-18A2-01BC-DE606468FE19}"/>
+              </a:ext>
+            </a:extLst>
+          </p:cNvPr>
+          <p:cNvPicPr>
+            <a:picLocks noChangeAspect="1"/>
+          </p:cNvPicPr>
+          <p:nvPr/>
+        </p:nvPicPr>
+        <p:blipFill>
+          <a:blip r:embed="rId3">
+            <a:extLst>
+              <a:ext uri="{96DAC541-7B7A-43D3-8B79-37D633B846F1}">
+                <asvg:svgBlip xmlns:asvg="http://schemas.microsoft.com/office/drawing/2016/SVG/main" r:embed="rId4"/>
+              </a:ext>
+            </a:extLst>
+          </a:blip>
+          <a:stretch>
+            <a:fillRect/>
+          </a:stretch>
+        </p:blipFill>
+        <p:spPr>
+          <a:xfrm>
+            <a:off x="5045006" y="6356057"/>
+            <a:ext cx="6409575" cy="363174"/>
+          </a:xfrm>
+          <a:prstGeom prst="rect">
+            <a:avLst/>
+          </a:prstGeom>
+        </p:spPr>
+      </p:pic>
+      <p:sp>
+        <p:nvSpPr>
+          <p:cNvPr id="84" name="Marcador de número de diapositiva 83">
+            <a:extLst>
+              <a:ext uri="{FF2B5EF4-FFF2-40B4-BE49-F238E27FC236}">
+                <a16:creationId xmlns:a16="http://schemas.microsoft.com/office/drawing/2014/main" id="{D5EC1078-1A87-F2AD-03DB-8678DFCABE43}"/>
+              </a:ext>
+            </a:extLst>
+          </p:cNvPr>
+          <p:cNvSpPr>
+            <a:spLocks noGrp="1"/>
+          </p:cNvSpPr>
+          <p:nvPr>
+            <p:ph type="sldNum" sz="quarter" idx="7"/>
+          </p:nvPr>
+        </p:nvSpPr>
+        <p:spPr/>
+        <p:txBody>
+          <a:bodyPr/>
+          <a:lstStyle/>
+          <a:p>
+            <a:fld id="{B6F15528-21DE-4FAA-801E-634DDDAF4B2B}" type="slidenum">
+              <a:rPr lang="es-ES" smtClean="0"/>
+              <a:t>7</a:t>
+            </a:fld>
+            <a:endParaRPr lang="es-ES"/>
+          </a:p>
+        </p:txBody>
+      </p:sp>
+      <p:sp>
+        <p:nvSpPr>
+          <p:cNvPr id="3" name="Marcador de pie de página 2">
+            <a:extLst>
+              <a:ext uri="{FF2B5EF4-FFF2-40B4-BE49-F238E27FC236}">
+                <a16:creationId xmlns:a16="http://schemas.microsoft.com/office/drawing/2014/main" id="{9791846A-18EC-FC87-E998-5041CEA93ADF}"/>
+              </a:ext>
+            </a:extLst>
+          </p:cNvPr>
+          <p:cNvSpPr>
+            <a:spLocks noGrp="1"/>
+          </p:cNvSpPr>
+          <p:nvPr>
+            <p:ph type="ftr" sz="quarter" idx="5"/>
+          </p:nvPr>
+        </p:nvSpPr>
+        <p:spPr/>
+        <p:txBody>
+          <a:bodyPr/>
+          <a:lstStyle/>
+          <a:p>
+            <a:pPr marL="12700">
+              <a:spcBef>
+                <a:spcPts val="15"/>
+              </a:spcBef>
+            </a:pPr>
+            <a:r>
+              <a:rPr lang="es-ES" spc="-5"/>
+              <a:t>LAB 0.2. COUPLERS</a:t>
+            </a:r>
+            <a:endParaRPr lang="es-ES" spc="-5" dirty="0"/>
+          </a:p>
+        </p:txBody>
+      </p:sp>
+      <p:sp>
+        <p:nvSpPr>
+          <p:cNvPr id="5" name="TextBox 4">
+            <a:extLst>
+              <a:ext uri="{FF2B5EF4-FFF2-40B4-BE49-F238E27FC236}">
+                <a16:creationId xmlns:a16="http://schemas.microsoft.com/office/drawing/2014/main" id="{DF4279DB-4DF1-2461-92C8-B02C69EC3154}"/>
+              </a:ext>
+            </a:extLst>
+          </p:cNvPr>
+          <p:cNvSpPr txBox="1"/>
+          <p:nvPr/>
+        </p:nvSpPr>
+        <p:spPr>
+          <a:xfrm>
+            <a:off x="694065" y="1136126"/>
+            <a:ext cx="5105400" cy="369332"/>
+          </a:xfrm>
+          <a:prstGeom prst="rect">
+            <a:avLst/>
+          </a:prstGeom>
+          <a:noFill/>
+        </p:spPr>
+        <p:txBody>
+          <a:bodyPr wrap="square">
+            <a:spAutoFit/>
+          </a:bodyPr>
+          <a:lstStyle/>
+          <a:p>
+            <a:pPr marL="0" indent="0">
+              <a:buNone/>
+            </a:pPr>
+            <a:r>
+              <a:rPr lang="en-US" sz="1800" b="1" dirty="0"/>
+              <a:t>Mode 0: TE Fraction: 100,00 %, TM Fraction 0,00 %</a:t>
+            </a:r>
+          </a:p>
+        </p:txBody>
+      </p:sp>
+      <p:sp>
+        <p:nvSpPr>
+          <p:cNvPr id="6" name="TextBox 5">
+            <a:extLst>
+              <a:ext uri="{FF2B5EF4-FFF2-40B4-BE49-F238E27FC236}">
+                <a16:creationId xmlns:a16="http://schemas.microsoft.com/office/drawing/2014/main" id="{4949F73F-A9C8-8EE1-2FB5-DBDD1673F892}"/>
+              </a:ext>
+            </a:extLst>
+          </p:cNvPr>
+          <p:cNvSpPr txBox="1"/>
+          <p:nvPr/>
+        </p:nvSpPr>
+        <p:spPr>
+          <a:xfrm>
+            <a:off x="6600210" y="1136126"/>
+            <a:ext cx="5080000" cy="369332"/>
+          </a:xfrm>
+          <a:prstGeom prst="rect">
+            <a:avLst/>
+          </a:prstGeom>
+          <a:noFill/>
+        </p:spPr>
+        <p:txBody>
+          <a:bodyPr wrap="square">
+            <a:spAutoFit/>
+          </a:bodyPr>
+          <a:lstStyle/>
+          <a:p>
+            <a:pPr marL="0" indent="0">
+              <a:buNone/>
+            </a:pPr>
+            <a:r>
+              <a:rPr lang="en-US" sz="1800" b="1" dirty="0"/>
+              <a:t>Mode 1: TE Fraction: 100,00 %, TM Fraction 0,00 %</a:t>
+            </a:r>
+          </a:p>
+        </p:txBody>
+      </p:sp>
+      <p:pic>
+        <p:nvPicPr>
+          <p:cNvPr id="12" name="Picture 11">
+            <a:extLst>
+              <a:ext uri="{FF2B5EF4-FFF2-40B4-BE49-F238E27FC236}">
+                <a16:creationId xmlns:a16="http://schemas.microsoft.com/office/drawing/2014/main" id="{895D73EE-146B-7640-3465-300C8CBF0F51}"/>
+              </a:ext>
+            </a:extLst>
+          </p:cNvPr>
+          <p:cNvPicPr>
+            <a:picLocks noChangeAspect="1"/>
+          </p:cNvPicPr>
+          <p:nvPr/>
+        </p:nvPicPr>
+        <p:blipFill>
+          <a:blip r:embed="rId5">
+            <a:extLst>
+              <a:ext uri="{28A0092B-C50C-407E-A947-70E740481C1C}">
+                <a14:useLocalDpi xmlns:a14="http://schemas.microsoft.com/office/drawing/2010/main" val="0"/>
+              </a:ext>
+            </a:extLst>
+          </a:blip>
+          <a:stretch>
+            <a:fillRect/>
+          </a:stretch>
+        </p:blipFill>
+        <p:spPr>
+          <a:xfrm>
+            <a:off x="609600" y="1639008"/>
+            <a:ext cx="5266954" cy="4480569"/>
+          </a:xfrm>
+          <a:prstGeom prst="rect">
+            <a:avLst/>
+          </a:prstGeom>
+        </p:spPr>
+      </p:pic>
+      <p:pic>
+        <p:nvPicPr>
+          <p:cNvPr id="14" name="Picture 13">
+            <a:extLst>
+              <a:ext uri="{FF2B5EF4-FFF2-40B4-BE49-F238E27FC236}">
+                <a16:creationId xmlns:a16="http://schemas.microsoft.com/office/drawing/2014/main" id="{7560B380-0B2B-CF7A-D13F-00B2FCBB26E9}"/>
+              </a:ext>
+            </a:extLst>
+          </p:cNvPr>
+          <p:cNvPicPr>
+            <a:picLocks noChangeAspect="1"/>
+          </p:cNvPicPr>
+          <p:nvPr/>
+        </p:nvPicPr>
+        <p:blipFill>
+          <a:blip r:embed="rId6">
+            <a:extLst>
+              <a:ext uri="{28A0092B-C50C-407E-A947-70E740481C1C}">
+                <a14:useLocalDpi xmlns:a14="http://schemas.microsoft.com/office/drawing/2010/main" val="0"/>
+              </a:ext>
+            </a:extLst>
+          </a:blip>
+          <a:stretch>
+            <a:fillRect/>
+          </a:stretch>
+        </p:blipFill>
+        <p:spPr>
+          <a:xfrm>
+            <a:off x="6600210" y="1741938"/>
+            <a:ext cx="5376683" cy="4480569"/>
+          </a:xfrm>
+          <a:prstGeom prst="rect">
+            <a:avLst/>
+          </a:prstGeom>
+        </p:spPr>
+      </p:pic>
+    </p:spTree>
+    <p:extLst>
+      <p:ext uri="{BB962C8B-B14F-4D97-AF65-F5344CB8AC3E}">
+        <p14:creationId xmlns:p14="http://schemas.microsoft.com/office/powerpoint/2010/main" val="1777087959"/>
+      </p:ext>
+    </p:extLst>
+  </p:cSld>
+  <p:clrMapOvr>
+    <a:masterClrMapping/>
+  </p:clrMapOvr>
+</p:sld>
+</file>
+
+<file path=ppt/slides/slide8.xml><?xml version="1.0" encoding="utf-8"?>
+<p:sld xmlns:a="http://schemas.openxmlformats.org/drawingml/2006/main" xmlns:r="http://schemas.openxmlformats.org/officeDocument/2006/relationships" xmlns:p="http://schemas.openxmlformats.org/presentationml/2006/main">
+  <p:cSld>
+    <p:spTree>
+      <p:nvGrpSpPr>
+        <p:cNvPr id="1" name="">
+          <a:extLst>
+            <a:ext uri="{FF2B5EF4-FFF2-40B4-BE49-F238E27FC236}">
+              <a16:creationId xmlns:a16="http://schemas.microsoft.com/office/drawing/2014/main" id="{1DFD9445-28C9-17A2-36C8-978DF7F5813B}"/>
+            </a:ext>
+          </a:extLst>
+        </p:cNvPr>
+        <p:cNvGrpSpPr/>
+        <p:nvPr/>
+      </p:nvGrpSpPr>
+      <p:grpSpPr>
+        <a:xfrm>
+          <a:off x="0" y="0"/>
+          <a:ext cx="0" cy="0"/>
+          <a:chOff x="0" y="0"/>
+          <a:chExt cx="0" cy="0"/>
+        </a:xfrm>
+      </p:grpSpPr>
+      <p:sp>
+        <p:nvSpPr>
+          <p:cNvPr id="16" name="object 16">
+            <a:extLst>
+              <a:ext uri="{FF2B5EF4-FFF2-40B4-BE49-F238E27FC236}">
+                <a16:creationId xmlns:a16="http://schemas.microsoft.com/office/drawing/2014/main" id="{7FC70CC7-B74D-2B84-5ECF-6FA2CE404E5C}"/>
+              </a:ext>
+            </a:extLst>
+          </p:cNvPr>
+          <p:cNvSpPr txBox="1">
+            <a:spLocks noGrp="1"/>
+          </p:cNvSpPr>
+          <p:nvPr>
+            <p:ph type="title"/>
+          </p:nvPr>
+        </p:nvSpPr>
+        <p:spPr>
+          <a:xfrm>
+            <a:off x="685800" y="408883"/>
+            <a:ext cx="10994410" cy="397545"/>
+          </a:xfrm>
+          <a:prstGeom prst="rect">
+            <a:avLst/>
+          </a:prstGeom>
+        </p:spPr>
+        <p:txBody>
+          <a:bodyPr vert="horz" wrap="square" lIns="0" tIns="12700" rIns="0" bIns="0" rtlCol="0">
+            <a:spAutoFit/>
+          </a:bodyPr>
+          <a:lstStyle/>
+          <a:p>
+            <a:pPr marL="12700">
+              <a:lnSpc>
+                <a:spcPct val="100000"/>
+              </a:lnSpc>
+              <a:spcBef>
+                <a:spcPts val="100"/>
+              </a:spcBef>
+            </a:pPr>
+            <a:r>
+              <a:rPr lang="en-US" sz="2500" dirty="0"/>
+              <a:t>Learning outcome #2 – Multimode Interference (MMI) Coupler cross-section</a:t>
+            </a:r>
+            <a:endParaRPr lang="en-US" sz="2500" b="0" dirty="0">
+              <a:latin typeface="+mj-lt"/>
+              <a:cs typeface="Lucida Sans"/>
+            </a:endParaRPr>
+          </a:p>
+        </p:txBody>
+      </p:sp>
+      <p:pic>
+        <p:nvPicPr>
+          <p:cNvPr id="83" name="Gráfico 82">
+            <a:extLst>
+              <a:ext uri="{FF2B5EF4-FFF2-40B4-BE49-F238E27FC236}">
+                <a16:creationId xmlns:a16="http://schemas.microsoft.com/office/drawing/2014/main" id="{86A84213-79A6-E977-4AE6-399CD1C5215A}"/>
+              </a:ext>
+            </a:extLst>
+          </p:cNvPr>
+          <p:cNvPicPr>
+            <a:picLocks noChangeAspect="1"/>
+          </p:cNvPicPr>
+          <p:nvPr/>
+        </p:nvPicPr>
+        <p:blipFill>
+          <a:blip r:embed="rId3">
+            <a:extLst>
+              <a:ext uri="{96DAC541-7B7A-43D3-8B79-37D633B846F1}">
+                <asvg:svgBlip xmlns:asvg="http://schemas.microsoft.com/office/drawing/2016/SVG/main" r:embed="rId4"/>
+              </a:ext>
+            </a:extLst>
+          </a:blip>
+          <a:stretch>
+            <a:fillRect/>
+          </a:stretch>
+        </p:blipFill>
+        <p:spPr>
+          <a:xfrm>
+            <a:off x="5045006" y="6356057"/>
+            <a:ext cx="6409575" cy="363174"/>
+          </a:xfrm>
+          <a:prstGeom prst="rect">
+            <a:avLst/>
+          </a:prstGeom>
+        </p:spPr>
+      </p:pic>
+      <p:sp>
+        <p:nvSpPr>
+          <p:cNvPr id="84" name="Marcador de número de diapositiva 83">
+            <a:extLst>
+              <a:ext uri="{FF2B5EF4-FFF2-40B4-BE49-F238E27FC236}">
+                <a16:creationId xmlns:a16="http://schemas.microsoft.com/office/drawing/2014/main" id="{B1AE7EA7-F473-506C-C008-E4AF63DE3799}"/>
+              </a:ext>
+            </a:extLst>
+          </p:cNvPr>
+          <p:cNvSpPr>
+            <a:spLocks noGrp="1"/>
+          </p:cNvSpPr>
+          <p:nvPr>
+            <p:ph type="sldNum" sz="quarter" idx="7"/>
+          </p:nvPr>
+        </p:nvSpPr>
+        <p:spPr/>
+        <p:txBody>
+          <a:bodyPr/>
+          <a:lstStyle/>
+          <a:p>
+            <a:fld id="{B6F15528-21DE-4FAA-801E-634DDDAF4B2B}" type="slidenum">
+              <a:rPr lang="es-ES" smtClean="0"/>
+              <a:t>8</a:t>
+            </a:fld>
+            <a:endParaRPr lang="es-ES"/>
+          </a:p>
+        </p:txBody>
+      </p:sp>
+      <p:sp>
+        <p:nvSpPr>
+          <p:cNvPr id="3" name="Marcador de pie de página 2">
+            <a:extLst>
+              <a:ext uri="{FF2B5EF4-FFF2-40B4-BE49-F238E27FC236}">
+                <a16:creationId xmlns:a16="http://schemas.microsoft.com/office/drawing/2014/main" id="{CE9BC9BB-05BF-D4D8-2BC5-CCE3339895DD}"/>
+              </a:ext>
+            </a:extLst>
+          </p:cNvPr>
+          <p:cNvSpPr>
+            <a:spLocks noGrp="1"/>
+          </p:cNvSpPr>
+          <p:nvPr>
+            <p:ph type="ftr" sz="quarter" idx="5"/>
+          </p:nvPr>
+        </p:nvSpPr>
+        <p:spPr/>
+        <p:txBody>
+          <a:bodyPr/>
+          <a:lstStyle/>
+          <a:p>
+            <a:pPr marL="12700">
+              <a:spcBef>
+                <a:spcPts val="15"/>
+              </a:spcBef>
+            </a:pPr>
+            <a:r>
+              <a:rPr lang="es-ES" spc="-5"/>
+              <a:t>LAB 0.2. COUPLERS</a:t>
+            </a:r>
+            <a:endParaRPr lang="es-ES" spc="-5" dirty="0"/>
+          </a:p>
+        </p:txBody>
+      </p:sp>
+      <p:sp>
+        <p:nvSpPr>
+          <p:cNvPr id="5" name="TextBox 4">
+            <a:extLst>
+              <a:ext uri="{FF2B5EF4-FFF2-40B4-BE49-F238E27FC236}">
+                <a16:creationId xmlns:a16="http://schemas.microsoft.com/office/drawing/2014/main" id="{EB97D2CC-B49D-C65F-D595-230C64C23D53}"/>
+              </a:ext>
+            </a:extLst>
+          </p:cNvPr>
+          <p:cNvSpPr txBox="1"/>
+          <p:nvPr/>
+        </p:nvSpPr>
+        <p:spPr>
+          <a:xfrm>
+            <a:off x="694065" y="1136126"/>
+            <a:ext cx="5105400" cy="369332"/>
+          </a:xfrm>
+          <a:prstGeom prst="rect">
+            <a:avLst/>
+          </a:prstGeom>
+          <a:noFill/>
+        </p:spPr>
+        <p:txBody>
+          <a:bodyPr wrap="square">
+            <a:spAutoFit/>
+          </a:bodyPr>
+          <a:lstStyle/>
+          <a:p>
+            <a:pPr marL="0" indent="0">
+              <a:buNone/>
+            </a:pPr>
+            <a:r>
+              <a:rPr lang="en-US" sz="1800" b="1" dirty="0"/>
+              <a:t>Mode 9: TE Fraction:0,02%, TM Fraction 99,98 %</a:t>
+            </a:r>
+          </a:p>
+        </p:txBody>
+      </p:sp>
+      <p:sp>
+        <p:nvSpPr>
+          <p:cNvPr id="6" name="TextBox 5">
+            <a:extLst>
+              <a:ext uri="{FF2B5EF4-FFF2-40B4-BE49-F238E27FC236}">
+                <a16:creationId xmlns:a16="http://schemas.microsoft.com/office/drawing/2014/main" id="{48A26BE8-659A-50CC-B378-2B13B7F6CBF7}"/>
+              </a:ext>
+            </a:extLst>
+          </p:cNvPr>
+          <p:cNvSpPr txBox="1"/>
+          <p:nvPr/>
+        </p:nvSpPr>
+        <p:spPr>
+          <a:xfrm>
+            <a:off x="6600210" y="1136126"/>
+            <a:ext cx="5080000" cy="369332"/>
+          </a:xfrm>
+          <a:prstGeom prst="rect">
+            <a:avLst/>
+          </a:prstGeom>
+          <a:noFill/>
+        </p:spPr>
+        <p:txBody>
+          <a:bodyPr wrap="square">
+            <a:spAutoFit/>
+          </a:bodyPr>
+          <a:lstStyle/>
+          <a:p>
+            <a:pPr marL="0" indent="0">
+              <a:buNone/>
+            </a:pPr>
+            <a:r>
+              <a:rPr lang="en-US" sz="1800" b="1" dirty="0"/>
+              <a:t>Mode 10: TE Fraction: </a:t>
+            </a:r>
+            <a:r>
+              <a:rPr lang="en-US" b="1" dirty="0"/>
+              <a:t>0,10</a:t>
+            </a:r>
+            <a:r>
+              <a:rPr lang="en-US" sz="1800" b="1" dirty="0"/>
+              <a:t> %, TM Fraction 99,98 %</a:t>
+            </a:r>
+          </a:p>
+        </p:txBody>
+      </p:sp>
+      <p:pic>
+        <p:nvPicPr>
+          <p:cNvPr id="4" name="Picture 3">
+            <a:extLst>
+              <a:ext uri="{FF2B5EF4-FFF2-40B4-BE49-F238E27FC236}">
+                <a16:creationId xmlns:a16="http://schemas.microsoft.com/office/drawing/2014/main" id="{7A2522CF-F172-CB06-104E-946927F9078D}"/>
+              </a:ext>
+            </a:extLst>
+          </p:cNvPr>
+          <p:cNvPicPr>
+            <a:picLocks noChangeAspect="1"/>
+          </p:cNvPicPr>
+          <p:nvPr/>
+        </p:nvPicPr>
+        <p:blipFill>
+          <a:blip r:embed="rId5">
+            <a:extLst>
+              <a:ext uri="{28A0092B-C50C-407E-A947-70E740481C1C}">
+                <a14:useLocalDpi xmlns:a14="http://schemas.microsoft.com/office/drawing/2010/main" val="0"/>
+              </a:ext>
+            </a:extLst>
+          </a:blip>
+          <a:stretch>
+            <a:fillRect/>
+          </a:stretch>
+        </p:blipFill>
+        <p:spPr>
+          <a:xfrm>
+            <a:off x="829046" y="1662843"/>
+            <a:ext cx="5266954" cy="4480569"/>
+          </a:xfrm>
+          <a:prstGeom prst="rect">
+            <a:avLst/>
+          </a:prstGeom>
+        </p:spPr>
+      </p:pic>
+      <p:pic>
+        <p:nvPicPr>
+          <p:cNvPr id="8" name="Picture 7">
+            <a:extLst>
+              <a:ext uri="{FF2B5EF4-FFF2-40B4-BE49-F238E27FC236}">
+                <a16:creationId xmlns:a16="http://schemas.microsoft.com/office/drawing/2014/main" id="{C73A3583-9489-15EB-7855-224225BD4966}"/>
+              </a:ext>
+            </a:extLst>
+          </p:cNvPr>
+          <p:cNvPicPr>
+            <a:picLocks noChangeAspect="1"/>
+          </p:cNvPicPr>
+          <p:nvPr/>
+        </p:nvPicPr>
+        <p:blipFill>
+          <a:blip r:embed="rId6">
+            <a:extLst>
+              <a:ext uri="{28A0092B-C50C-407E-A947-70E740481C1C}">
+                <a14:useLocalDpi xmlns:a14="http://schemas.microsoft.com/office/drawing/2010/main" val="0"/>
+              </a:ext>
+            </a:extLst>
+          </a:blip>
+          <a:stretch>
+            <a:fillRect/>
+          </a:stretch>
+        </p:blipFill>
+        <p:spPr>
+          <a:xfrm>
+            <a:off x="6630111" y="1662842"/>
+            <a:ext cx="5376683" cy="4480569"/>
+          </a:xfrm>
+          <a:prstGeom prst="rect">
+            <a:avLst/>
+          </a:prstGeom>
+        </p:spPr>
+      </p:pic>
+    </p:spTree>
+    <p:extLst>
+      <p:ext uri="{BB962C8B-B14F-4D97-AF65-F5344CB8AC3E}">
+        <p14:creationId xmlns:p14="http://schemas.microsoft.com/office/powerpoint/2010/main" val="409643619"/>
+      </p:ext>
+    </p:extLst>
+  </p:cSld>
+  <p:clrMapOvr>
+    <a:masterClrMapping/>
+  </p:clrMapOvr>
+</p:sld>
+</file>
+
+<file path=ppt/slides/slide9.xml><?xml version="1.0" encoding="utf-8"?>
 <p:sld xmlns:a="http://schemas.openxmlformats.org/drawingml/2006/main" xmlns:r="http://schemas.openxmlformats.org/officeDocument/2006/relationships" xmlns:p="http://schemas.openxmlformats.org/presentationml/2006/main">
   <p:cSld>
     <p:spTree>
@@ -5902,7 +9199,7 @@
             </a:pPr>
             <a:r>
               <a:rPr lang="en-US" sz="2500" dirty="0"/>
-              <a:t>Learning outcome #2 – Multimode Interference (MMI) Coupler cross-section</a:t>
+              <a:t>Learning outcome #2 – Modes propagating on a MMI with a width of 12 um</a:t>
             </a:r>
             <a:endParaRPr lang="en-US" sz="2500" b="0" dirty="0">
               <a:latin typeface="+mj-lt"/>
@@ -5970,7 +9267,7 @@
           <a:p>
             <a:fld id="{B6F15528-21DE-4FAA-801E-634DDDAF4B2B}" type="slidenum">
               <a:rPr lang="es-ES" smtClean="0"/>
-              <a:t>5</a:t>
+              <a:t>9</a:t>
             </a:fld>
             <a:endParaRPr lang="es-ES"/>
           </a:p>
@@ -6052,159 +9349,6 @@
         <p14:creationId xmlns:p14="http://schemas.microsoft.com/office/powerpoint/2010/main" val="3314494187"/>
       </p:ext>
     </p:extLst>
-  </p:cSld>
-  <p:clrMapOvr>
-    <a:masterClrMapping/>
-  </p:clrMapOvr>
-</p:sld>
-</file>
-
-<file path=ppt/slides/slide6.xml><?xml version="1.0" encoding="utf-8"?>
-<p:sld xmlns:a="http://schemas.openxmlformats.org/drawingml/2006/main" xmlns:r="http://schemas.openxmlformats.org/officeDocument/2006/relationships" xmlns:p="http://schemas.openxmlformats.org/presentationml/2006/main">
-  <p:cSld>
-    <p:spTree>
-      <p:nvGrpSpPr>
-        <p:cNvPr id="1" name=""/>
-        <p:cNvGrpSpPr/>
-        <p:nvPr/>
-      </p:nvGrpSpPr>
-      <p:grpSpPr>
-        <a:xfrm>
-          <a:off x="0" y="0"/>
-          <a:ext cx="0" cy="0"/>
-          <a:chOff x="0" y="0"/>
-          <a:chExt cx="0" cy="0"/>
-        </a:xfrm>
-      </p:grpSpPr>
-      <p:sp>
-        <p:nvSpPr>
-          <p:cNvPr id="3" name="object 3"/>
-          <p:cNvSpPr/>
-          <p:nvPr/>
-        </p:nvSpPr>
-        <p:spPr>
-          <a:xfrm>
-            <a:off x="3945635" y="2636520"/>
-            <a:ext cx="8246363" cy="1584959"/>
-          </a:xfrm>
-          <a:prstGeom prst="rect">
-            <a:avLst/>
-          </a:prstGeom>
-          <a:blipFill>
-            <a:blip r:embed="rId2" cstate="print"/>
-            <a:stretch>
-              <a:fillRect/>
-            </a:stretch>
-          </a:blipFill>
-        </p:spPr>
-        <p:txBody>
-          <a:bodyPr wrap="square" lIns="0" tIns="0" rIns="0" bIns="0" rtlCol="0"/>
-          <a:lstStyle/>
-          <a:p>
-            <a:endParaRPr/>
-          </a:p>
-        </p:txBody>
-      </p:sp>
-      <p:sp>
-        <p:nvSpPr>
-          <p:cNvPr id="4" name="object 4"/>
-          <p:cNvSpPr txBox="1">
-            <a:spLocks noGrp="1"/>
-          </p:cNvSpPr>
-          <p:nvPr>
-            <p:ph type="title"/>
-          </p:nvPr>
-        </p:nvSpPr>
-        <p:spPr>
-          <a:xfrm>
-            <a:off x="4513326" y="3165729"/>
-            <a:ext cx="2233295" cy="513715"/>
-          </a:xfrm>
-          <a:prstGeom prst="rect">
-            <a:avLst/>
-          </a:prstGeom>
-        </p:spPr>
-        <p:txBody>
-          <a:bodyPr vert="horz" wrap="square" lIns="0" tIns="13335" rIns="0" bIns="0" rtlCol="0">
-            <a:spAutoFit/>
-          </a:bodyPr>
-          <a:lstStyle/>
-          <a:p>
-            <a:pPr marL="12700">
-              <a:lnSpc>
-                <a:spcPct val="100000"/>
-              </a:lnSpc>
-              <a:spcBef>
-                <a:spcPts val="105"/>
-              </a:spcBef>
-            </a:pPr>
-            <a:r>
-              <a:rPr sz="3200" b="1" spc="-5" dirty="0">
-                <a:solidFill>
-                  <a:srgbClr val="FFFFFF"/>
-                </a:solidFill>
-                <a:latin typeface="Lucida Sans"/>
-                <a:cs typeface="Lucida Sans"/>
-              </a:rPr>
-              <a:t>Thank</a:t>
-            </a:r>
-            <a:r>
-              <a:rPr sz="3200" b="1" spc="-55" dirty="0">
-                <a:solidFill>
-                  <a:srgbClr val="FFFFFF"/>
-                </a:solidFill>
-                <a:latin typeface="Lucida Sans"/>
-                <a:cs typeface="Lucida Sans"/>
-              </a:rPr>
-              <a:t> </a:t>
-            </a:r>
-            <a:r>
-              <a:rPr sz="3200" b="1" dirty="0">
-                <a:solidFill>
-                  <a:srgbClr val="FFFFFF"/>
-                </a:solidFill>
-                <a:latin typeface="Lucida Sans"/>
-                <a:cs typeface="Lucida Sans"/>
-              </a:rPr>
-              <a:t>you</a:t>
-            </a:r>
-            <a:endParaRPr sz="3200">
-              <a:latin typeface="Lucida Sans"/>
-              <a:cs typeface="Lucida Sans"/>
-            </a:endParaRPr>
-          </a:p>
-        </p:txBody>
-      </p:sp>
-      <p:sp>
-        <p:nvSpPr>
-          <p:cNvPr id="5" name="Marcador de número de diapositiva 4">
-            <a:extLst>
-              <a:ext uri="{FF2B5EF4-FFF2-40B4-BE49-F238E27FC236}">
-                <a16:creationId xmlns:a16="http://schemas.microsoft.com/office/drawing/2014/main" id="{B052DA19-AD24-7D24-2AE9-51F8F5A7F5E0}"/>
-              </a:ext>
-            </a:extLst>
-          </p:cNvPr>
-          <p:cNvSpPr>
-            <a:spLocks noGrp="1"/>
-          </p:cNvSpPr>
-          <p:nvPr>
-            <p:ph type="sldNum" sz="quarter" idx="7"/>
-          </p:nvPr>
-        </p:nvSpPr>
-        <p:spPr/>
-        <p:txBody>
-          <a:bodyPr/>
-          <a:lstStyle/>
-          <a:p>
-            <a:fld id="{B6F15528-21DE-4FAA-801E-634DDDAF4B2B}" type="slidenum">
-              <a:rPr lang="es-ES" smtClean="0"/>
-              <a:t>6</a:t>
-            </a:fld>
-            <a:endParaRPr lang="es-ES"/>
-          </a:p>
-        </p:txBody>
-      </p:sp>
-    </p:spTree>
   </p:cSld>
   <p:clrMapOvr>
     <a:masterClrMapping/>
